--- a/REI-Combinatoria/Materiales en español/02b - Dosier de trabajo - Versión imprimible - PPT.pptx
+++ b/REI-Combinatoria/Materiales en español/02b - Dosier de trabajo - Versión imprimible - PPT.pptx
@@ -68,36 +68,41 @@
       <p:regular r:id="rId29"/>
     </p:embeddedFont>
     <p:embeddedFont>
-      <p:font typeface="Glacial Indifference" panose="020B0604020202020204" charset="0"/>
+      <p:font typeface="Glacial Indifference" pitchFamily="50" charset="0"/>
       <p:regular r:id="rId30"/>
+      <p:bold r:id="rId31"/>
+      <p:italic r:id="rId32"/>
     </p:embeddedFont>
     <p:embeddedFont>
       <p:font typeface="Glacial Indifference Bold" panose="020B0604020202020204" charset="0"/>
-      <p:regular r:id="rId31"/>
+      <p:regular r:id="rId33"/>
     </p:embeddedFont>
     <p:embeddedFont>
       <p:font typeface="Inter" panose="020B0604020202020204" charset="0"/>
-      <p:regular r:id="rId32"/>
+      <p:regular r:id="rId34"/>
     </p:embeddedFont>
     <p:embeddedFont>
       <p:font typeface="Inter Bold" panose="020B0604020202020204" charset="0"/>
-      <p:regular r:id="rId33"/>
+      <p:regular r:id="rId35"/>
     </p:embeddedFont>
     <p:embeddedFont>
       <p:font typeface="Lato" panose="020F0502020204030203" pitchFamily="34" charset="0"/>
-      <p:regular r:id="rId34"/>
+      <p:regular r:id="rId36"/>
+      <p:bold r:id="rId37"/>
+      <p:italic r:id="rId38"/>
+      <p:boldItalic r:id="rId39"/>
     </p:embeddedFont>
     <p:embeddedFont>
       <p:font typeface="Lato Bold" panose="020F0502020204030203" charset="0"/>
-      <p:regular r:id="rId35"/>
+      <p:regular r:id="rId40"/>
     </p:embeddedFont>
     <p:embeddedFont>
       <p:font typeface="Nefelibata Script" panose="020B0604020202020204" charset="0"/>
-      <p:regular r:id="rId36"/>
+      <p:regular r:id="rId41"/>
     </p:embeddedFont>
     <p:embeddedFont>
       <p:font typeface="White Star" panose="020B0604020202020204" charset="0"/>
-      <p:regular r:id="rId37"/>
+      <p:regular r:id="rId42"/>
     </p:embeddedFont>
   </p:embeddedFontLst>
   <p:defaultTextStyle>
@@ -217,13 +222,37 @@
 <file path=ppt/revisionInfo.xml><?xml version="1.0" encoding="utf-8"?>
 <p1510:revInfo xmlns:a="http://schemas.openxmlformats.org/drawingml/2006/main" xmlns:r="http://schemas.openxmlformats.org/officeDocument/2006/relationships" xmlns:p1510="http://schemas.microsoft.com/office/powerpoint/2015/10/main">
   <p1510:revLst>
-    <p1510:client id="{7CBEF9B2-E1BD-41D8-8236-32E23EE1C683}" v="4" dt="2025-01-14T07:43:28.903"/>
+    <p1510:client id="{12FE4401-C7A4-4A1D-A96A-448890534099}" v="1" dt="2025-10-16T17:30:28.491"/>
   </p1510:revLst>
 </p1510:revInfo>
 </file>
 
 <file path=ppt/changesInfos/changesInfo1.xml><?xml version="1.0" encoding="utf-8"?>
 <pc:chgInfo xmlns:a="http://schemas.openxmlformats.org/drawingml/2006/main" xmlns:r="http://schemas.openxmlformats.org/officeDocument/2006/relationships" xmlns:ac="http://schemas.microsoft.com/office/drawing/2013/main/command" xmlns:pc="http://schemas.microsoft.com/office/powerpoint/2013/main/command">
+  <pc:docChgLst>
+    <pc:chgData name="Susana Vasquez Elias" userId="e776416f-e583-4d77-b224-146689d50a03" providerId="ADAL" clId="{3C100498-C411-419B-B5E6-C2EF21CD595F}"/>
+    <pc:docChg chg="modSld">
+      <pc:chgData name="Susana Vasquez Elias" userId="e776416f-e583-4d77-b224-146689d50a03" providerId="ADAL" clId="{3C100498-C411-419B-B5E6-C2EF21CD595F}" dt="2025-10-16T17:30:31.186" v="1" actId="1076"/>
+      <pc:docMkLst>
+        <pc:docMk/>
+      </pc:docMkLst>
+      <pc:sldChg chg="addSp modSp mod">
+        <pc:chgData name="Susana Vasquez Elias" userId="e776416f-e583-4d77-b224-146689d50a03" providerId="ADAL" clId="{3C100498-C411-419B-B5E6-C2EF21CD595F}" dt="2025-10-16T17:30:31.186" v="1" actId="1076"/>
+        <pc:sldMkLst>
+          <pc:docMk/>
+          <pc:sldMk cId="0" sldId="256"/>
+        </pc:sldMkLst>
+        <pc:picChg chg="add mod">
+          <ac:chgData name="Susana Vasquez Elias" userId="e776416f-e583-4d77-b224-146689d50a03" providerId="ADAL" clId="{3C100498-C411-419B-B5E6-C2EF21CD595F}" dt="2025-10-16T17:30:31.186" v="1" actId="1076"/>
+          <ac:picMkLst>
+            <pc:docMk/>
+            <pc:sldMk cId="0" sldId="256"/>
+            <ac:picMk id="12" creationId="{2ADF4236-C311-988C-1EAF-F33444BF8989}"/>
+          </ac:picMkLst>
+        </pc:picChg>
+      </pc:sldChg>
+    </pc:docChg>
+  </pc:docChgLst>
   <pc:docChgLst>
     <pc:chgData name="Susana Vásquez" userId="dffc548e-2323-4ffc-a8aa-757e426c1faa" providerId="ADAL" clId="{CDF94FC1-676E-47EB-A349-9E3B1D8550EA}"/>
     <pc:docChg chg="undo custSel addSld delSld modSld">
@@ -251,918 +280,6 @@
           <pc:docMk/>
           <pc:sldMk cId="0" sldId="270"/>
         </pc:sldMkLst>
-        <pc:spChg chg="add mod">
-          <ac:chgData name="Susana Vásquez" userId="dffc548e-2323-4ffc-a8aa-757e426c1faa" providerId="ADAL" clId="{CDF94FC1-676E-47EB-A349-9E3B1D8550EA}" dt="2024-11-30T08:39:06.488" v="1"/>
-          <ac:spMkLst>
-            <pc:docMk/>
-            <pc:sldMk cId="0" sldId="270"/>
-            <ac:spMk id="126" creationId="{1F5E5A6E-D3B6-5E52-8A60-C4486B9652A5}"/>
-          </ac:spMkLst>
-        </pc:spChg>
-        <pc:spChg chg="add mod">
-          <ac:chgData name="Susana Vásquez" userId="dffc548e-2323-4ffc-a8aa-757e426c1faa" providerId="ADAL" clId="{CDF94FC1-676E-47EB-A349-9E3B1D8550EA}" dt="2024-11-30T08:39:06.488" v="1"/>
-          <ac:spMkLst>
-            <pc:docMk/>
-            <pc:sldMk cId="0" sldId="270"/>
-            <ac:spMk id="127" creationId="{DC448951-D4AF-E936-C440-6975DD87D52E}"/>
-          </ac:spMkLst>
-        </pc:spChg>
-        <pc:spChg chg="mod">
-          <ac:chgData name="Susana Vásquez" userId="dffc548e-2323-4ffc-a8aa-757e426c1faa" providerId="ADAL" clId="{CDF94FC1-676E-47EB-A349-9E3B1D8550EA}" dt="2024-11-30T08:39:06.488" v="1"/>
-          <ac:spMkLst>
-            <pc:docMk/>
-            <pc:sldMk cId="0" sldId="270"/>
-            <ac:spMk id="129" creationId="{C6125DC2-3B86-7624-F27D-569060B76570}"/>
-          </ac:spMkLst>
-        </pc:spChg>
-        <pc:spChg chg="mod">
-          <ac:chgData name="Susana Vásquez" userId="dffc548e-2323-4ffc-a8aa-757e426c1faa" providerId="ADAL" clId="{CDF94FC1-676E-47EB-A349-9E3B1D8550EA}" dt="2024-11-30T08:39:06.488" v="1"/>
-          <ac:spMkLst>
-            <pc:docMk/>
-            <pc:sldMk cId="0" sldId="270"/>
-            <ac:spMk id="130" creationId="{422EC894-BC97-D2E9-DC7B-7D381AB82362}"/>
-          </ac:spMkLst>
-        </pc:spChg>
-        <pc:spChg chg="add mod">
-          <ac:chgData name="Susana Vásquez" userId="dffc548e-2323-4ffc-a8aa-757e426c1faa" providerId="ADAL" clId="{CDF94FC1-676E-47EB-A349-9E3B1D8550EA}" dt="2024-11-30T08:39:06.488" v="1"/>
-          <ac:spMkLst>
-            <pc:docMk/>
-            <pc:sldMk cId="0" sldId="270"/>
-            <ac:spMk id="131" creationId="{B35CE2A2-93E6-DAD5-5265-4760C5BBC7C2}"/>
-          </ac:spMkLst>
-        </pc:spChg>
-        <pc:spChg chg="mod">
-          <ac:chgData name="Susana Vásquez" userId="dffc548e-2323-4ffc-a8aa-757e426c1faa" providerId="ADAL" clId="{CDF94FC1-676E-47EB-A349-9E3B1D8550EA}" dt="2024-11-30T08:39:06.488" v="1"/>
-          <ac:spMkLst>
-            <pc:docMk/>
-            <pc:sldMk cId="0" sldId="270"/>
-            <ac:spMk id="133" creationId="{44C5094B-694A-2D7C-A0D0-F2F92EAFBCFE}"/>
-          </ac:spMkLst>
-        </pc:spChg>
-        <pc:spChg chg="mod">
-          <ac:chgData name="Susana Vásquez" userId="dffc548e-2323-4ffc-a8aa-757e426c1faa" providerId="ADAL" clId="{CDF94FC1-676E-47EB-A349-9E3B1D8550EA}" dt="2024-11-30T08:39:06.488" v="1"/>
-          <ac:spMkLst>
-            <pc:docMk/>
-            <pc:sldMk cId="0" sldId="270"/>
-            <ac:spMk id="134" creationId="{54F93E5A-6186-18D7-66E7-419EDEA66C68}"/>
-          </ac:spMkLst>
-        </pc:spChg>
-        <pc:spChg chg="add mod">
-          <ac:chgData name="Susana Vásquez" userId="dffc548e-2323-4ffc-a8aa-757e426c1faa" providerId="ADAL" clId="{CDF94FC1-676E-47EB-A349-9E3B1D8550EA}" dt="2024-11-30T08:39:06.488" v="1"/>
-          <ac:spMkLst>
-            <pc:docMk/>
-            <pc:sldMk cId="0" sldId="270"/>
-            <ac:spMk id="135" creationId="{6E07B9ED-B43F-F0D4-24A5-02EA4C80F9B2}"/>
-          </ac:spMkLst>
-        </pc:spChg>
-        <pc:spChg chg="mod">
-          <ac:chgData name="Susana Vásquez" userId="dffc548e-2323-4ffc-a8aa-757e426c1faa" providerId="ADAL" clId="{CDF94FC1-676E-47EB-A349-9E3B1D8550EA}" dt="2024-11-30T08:39:06.488" v="1"/>
-          <ac:spMkLst>
-            <pc:docMk/>
-            <pc:sldMk cId="0" sldId="270"/>
-            <ac:spMk id="138" creationId="{AE7A2E66-8575-4B39-70E9-D14246EF71AB}"/>
-          </ac:spMkLst>
-        </pc:spChg>
-        <pc:spChg chg="mod">
-          <ac:chgData name="Susana Vásquez" userId="dffc548e-2323-4ffc-a8aa-757e426c1faa" providerId="ADAL" clId="{CDF94FC1-676E-47EB-A349-9E3B1D8550EA}" dt="2024-11-30T08:39:06.488" v="1"/>
-          <ac:spMkLst>
-            <pc:docMk/>
-            <pc:sldMk cId="0" sldId="270"/>
-            <ac:spMk id="139" creationId="{7C6DC033-5DE7-7A35-4510-689ACC9028C7}"/>
-          </ac:spMkLst>
-        </pc:spChg>
-        <pc:spChg chg="mod">
-          <ac:chgData name="Susana Vásquez" userId="dffc548e-2323-4ffc-a8aa-757e426c1faa" providerId="ADAL" clId="{CDF94FC1-676E-47EB-A349-9E3B1D8550EA}" dt="2024-11-30T08:39:06.488" v="1"/>
-          <ac:spMkLst>
-            <pc:docMk/>
-            <pc:sldMk cId="0" sldId="270"/>
-            <ac:spMk id="141" creationId="{2C27E001-7C23-BD1D-E917-F9039F9A360F}"/>
-          </ac:spMkLst>
-        </pc:spChg>
-        <pc:spChg chg="mod">
-          <ac:chgData name="Susana Vásquez" userId="dffc548e-2323-4ffc-a8aa-757e426c1faa" providerId="ADAL" clId="{CDF94FC1-676E-47EB-A349-9E3B1D8550EA}" dt="2024-11-30T08:39:06.488" v="1"/>
-          <ac:spMkLst>
-            <pc:docMk/>
-            <pc:sldMk cId="0" sldId="270"/>
-            <ac:spMk id="142" creationId="{BF2D13DF-A22C-7533-95C1-BBAB5A150BBE}"/>
-          </ac:spMkLst>
-        </pc:spChg>
-        <pc:spChg chg="mod">
-          <ac:chgData name="Susana Vásquez" userId="dffc548e-2323-4ffc-a8aa-757e426c1faa" providerId="ADAL" clId="{CDF94FC1-676E-47EB-A349-9E3B1D8550EA}" dt="2024-11-30T08:39:06.488" v="1"/>
-          <ac:spMkLst>
-            <pc:docMk/>
-            <pc:sldMk cId="0" sldId="270"/>
-            <ac:spMk id="144" creationId="{210710D5-D095-29E7-F8CE-A5EC1C8DFD48}"/>
-          </ac:spMkLst>
-        </pc:spChg>
-        <pc:spChg chg="mod">
-          <ac:chgData name="Susana Vásquez" userId="dffc548e-2323-4ffc-a8aa-757e426c1faa" providerId="ADAL" clId="{CDF94FC1-676E-47EB-A349-9E3B1D8550EA}" dt="2024-11-30T08:39:06.488" v="1"/>
-          <ac:spMkLst>
-            <pc:docMk/>
-            <pc:sldMk cId="0" sldId="270"/>
-            <ac:spMk id="145" creationId="{26110AA7-572C-08AE-461F-270CF3C293B6}"/>
-          </ac:spMkLst>
-        </pc:spChg>
-        <pc:spChg chg="add mod">
-          <ac:chgData name="Susana Vásquez" userId="dffc548e-2323-4ffc-a8aa-757e426c1faa" providerId="ADAL" clId="{CDF94FC1-676E-47EB-A349-9E3B1D8550EA}" dt="2024-11-30T08:39:06.488" v="1"/>
-          <ac:spMkLst>
-            <pc:docMk/>
-            <pc:sldMk cId="0" sldId="270"/>
-            <ac:spMk id="146" creationId="{44936B27-DAA3-2695-4CF4-261A33365698}"/>
-          </ac:spMkLst>
-        </pc:spChg>
-        <pc:spChg chg="mod">
-          <ac:chgData name="Susana Vásquez" userId="dffc548e-2323-4ffc-a8aa-757e426c1faa" providerId="ADAL" clId="{CDF94FC1-676E-47EB-A349-9E3B1D8550EA}" dt="2024-11-30T08:39:06.488" v="1"/>
-          <ac:spMkLst>
-            <pc:docMk/>
-            <pc:sldMk cId="0" sldId="270"/>
-            <ac:spMk id="148" creationId="{EF5986EC-C91D-B7BE-5726-5FBC0255C1F8}"/>
-          </ac:spMkLst>
-        </pc:spChg>
-        <pc:spChg chg="mod">
-          <ac:chgData name="Susana Vásquez" userId="dffc548e-2323-4ffc-a8aa-757e426c1faa" providerId="ADAL" clId="{CDF94FC1-676E-47EB-A349-9E3B1D8550EA}" dt="2024-11-30T08:39:06.488" v="1"/>
-          <ac:spMkLst>
-            <pc:docMk/>
-            <pc:sldMk cId="0" sldId="270"/>
-            <ac:spMk id="149" creationId="{8B369669-0B54-65A1-73C4-A06C80C5B673}"/>
-          </ac:spMkLst>
-        </pc:spChg>
-        <pc:spChg chg="mod">
-          <ac:chgData name="Susana Vásquez" userId="dffc548e-2323-4ffc-a8aa-757e426c1faa" providerId="ADAL" clId="{CDF94FC1-676E-47EB-A349-9E3B1D8550EA}" dt="2024-11-30T08:39:06.488" v="1"/>
-          <ac:spMkLst>
-            <pc:docMk/>
-            <pc:sldMk cId="0" sldId="270"/>
-            <ac:spMk id="152" creationId="{D528A0FC-EC13-62EA-C989-DE58891E26CE}"/>
-          </ac:spMkLst>
-        </pc:spChg>
-        <pc:spChg chg="mod">
-          <ac:chgData name="Susana Vásquez" userId="dffc548e-2323-4ffc-a8aa-757e426c1faa" providerId="ADAL" clId="{CDF94FC1-676E-47EB-A349-9E3B1D8550EA}" dt="2024-11-30T08:39:06.488" v="1"/>
-          <ac:spMkLst>
-            <pc:docMk/>
-            <pc:sldMk cId="0" sldId="270"/>
-            <ac:spMk id="153" creationId="{E6C29F77-ACF4-8DFE-E1FF-4B97773DE76C}"/>
-          </ac:spMkLst>
-        </pc:spChg>
-        <pc:spChg chg="mod">
-          <ac:chgData name="Susana Vásquez" userId="dffc548e-2323-4ffc-a8aa-757e426c1faa" providerId="ADAL" clId="{CDF94FC1-676E-47EB-A349-9E3B1D8550EA}" dt="2024-11-30T08:39:06.488" v="1"/>
-          <ac:spMkLst>
-            <pc:docMk/>
-            <pc:sldMk cId="0" sldId="270"/>
-            <ac:spMk id="156" creationId="{215BD9D1-CAF9-9CAE-6BFA-C94A9F18C17D}"/>
-          </ac:spMkLst>
-        </pc:spChg>
-        <pc:spChg chg="mod">
-          <ac:chgData name="Susana Vásquez" userId="dffc548e-2323-4ffc-a8aa-757e426c1faa" providerId="ADAL" clId="{CDF94FC1-676E-47EB-A349-9E3B1D8550EA}" dt="2024-11-30T08:39:06.488" v="1"/>
-          <ac:spMkLst>
-            <pc:docMk/>
-            <pc:sldMk cId="0" sldId="270"/>
-            <ac:spMk id="157" creationId="{7A4D04F0-B4F9-43DE-02DA-153745FFFA3B}"/>
-          </ac:spMkLst>
-        </pc:spChg>
-        <pc:spChg chg="mod">
-          <ac:chgData name="Susana Vásquez" userId="dffc548e-2323-4ffc-a8aa-757e426c1faa" providerId="ADAL" clId="{CDF94FC1-676E-47EB-A349-9E3B1D8550EA}" dt="2024-11-30T08:39:06.488" v="1"/>
-          <ac:spMkLst>
-            <pc:docMk/>
-            <pc:sldMk cId="0" sldId="270"/>
-            <ac:spMk id="160" creationId="{0D9D348E-ECE8-2153-FA79-8DB1E756E870}"/>
-          </ac:spMkLst>
-        </pc:spChg>
-        <pc:spChg chg="mod">
-          <ac:chgData name="Susana Vásquez" userId="dffc548e-2323-4ffc-a8aa-757e426c1faa" providerId="ADAL" clId="{CDF94FC1-676E-47EB-A349-9E3B1D8550EA}" dt="2024-11-30T08:39:06.488" v="1"/>
-          <ac:spMkLst>
-            <pc:docMk/>
-            <pc:sldMk cId="0" sldId="270"/>
-            <ac:spMk id="161" creationId="{157D7913-090E-8384-CCE0-D0014F7A1708}"/>
-          </ac:spMkLst>
-        </pc:spChg>
-        <pc:spChg chg="mod">
-          <ac:chgData name="Susana Vásquez" userId="dffc548e-2323-4ffc-a8aa-757e426c1faa" providerId="ADAL" clId="{CDF94FC1-676E-47EB-A349-9E3B1D8550EA}" dt="2024-11-30T08:39:06.488" v="1"/>
-          <ac:spMkLst>
-            <pc:docMk/>
-            <pc:sldMk cId="0" sldId="270"/>
-            <ac:spMk id="163" creationId="{D58C3CB6-5A06-F326-953F-ED0293D61477}"/>
-          </ac:spMkLst>
-        </pc:spChg>
-        <pc:spChg chg="mod">
-          <ac:chgData name="Susana Vásquez" userId="dffc548e-2323-4ffc-a8aa-757e426c1faa" providerId="ADAL" clId="{CDF94FC1-676E-47EB-A349-9E3B1D8550EA}" dt="2024-11-30T08:39:06.488" v="1"/>
-          <ac:spMkLst>
-            <pc:docMk/>
-            <pc:sldMk cId="0" sldId="270"/>
-            <ac:spMk id="165" creationId="{F5A6671D-707C-CC65-68B5-D2013F1EB058}"/>
-          </ac:spMkLst>
-        </pc:spChg>
-        <pc:spChg chg="mod">
-          <ac:chgData name="Susana Vásquez" userId="dffc548e-2323-4ffc-a8aa-757e426c1faa" providerId="ADAL" clId="{CDF94FC1-676E-47EB-A349-9E3B1D8550EA}" dt="2024-11-30T08:39:06.488" v="1"/>
-          <ac:spMkLst>
-            <pc:docMk/>
-            <pc:sldMk cId="0" sldId="270"/>
-            <ac:spMk id="167" creationId="{159B5C7C-007B-FF93-A582-E36B560E4EA4}"/>
-          </ac:spMkLst>
-        </pc:spChg>
-        <pc:spChg chg="mod">
-          <ac:chgData name="Susana Vásquez" userId="dffc548e-2323-4ffc-a8aa-757e426c1faa" providerId="ADAL" clId="{CDF94FC1-676E-47EB-A349-9E3B1D8550EA}" dt="2024-11-30T08:39:06.488" v="1"/>
-          <ac:spMkLst>
-            <pc:docMk/>
-            <pc:sldMk cId="0" sldId="270"/>
-            <ac:spMk id="169" creationId="{1F9562F9-C8FC-9578-6C60-DB0283CEF258}"/>
-          </ac:spMkLst>
-        </pc:spChg>
-        <pc:spChg chg="mod">
-          <ac:chgData name="Susana Vásquez" userId="dffc548e-2323-4ffc-a8aa-757e426c1faa" providerId="ADAL" clId="{CDF94FC1-676E-47EB-A349-9E3B1D8550EA}" dt="2024-11-30T08:39:06.488" v="1"/>
-          <ac:spMkLst>
-            <pc:docMk/>
-            <pc:sldMk cId="0" sldId="270"/>
-            <ac:spMk id="172" creationId="{902B908A-755C-A89D-FD49-020B9C63977B}"/>
-          </ac:spMkLst>
-        </pc:spChg>
-        <pc:spChg chg="mod">
-          <ac:chgData name="Susana Vásquez" userId="dffc548e-2323-4ffc-a8aa-757e426c1faa" providerId="ADAL" clId="{CDF94FC1-676E-47EB-A349-9E3B1D8550EA}" dt="2024-11-30T08:39:06.488" v="1"/>
-          <ac:spMkLst>
-            <pc:docMk/>
-            <pc:sldMk cId="0" sldId="270"/>
-            <ac:spMk id="173" creationId="{69E098C6-7027-6994-57A9-4195D81A600A}"/>
-          </ac:spMkLst>
-        </pc:spChg>
-        <pc:spChg chg="mod">
-          <ac:chgData name="Susana Vásquez" userId="dffc548e-2323-4ffc-a8aa-757e426c1faa" providerId="ADAL" clId="{CDF94FC1-676E-47EB-A349-9E3B1D8550EA}" dt="2024-11-30T08:39:06.488" v="1"/>
-          <ac:spMkLst>
-            <pc:docMk/>
-            <pc:sldMk cId="0" sldId="270"/>
-            <ac:spMk id="176" creationId="{9DF556C8-DF1F-C604-DB74-364B201560D6}"/>
-          </ac:spMkLst>
-        </pc:spChg>
-        <pc:spChg chg="mod">
-          <ac:chgData name="Susana Vásquez" userId="dffc548e-2323-4ffc-a8aa-757e426c1faa" providerId="ADAL" clId="{CDF94FC1-676E-47EB-A349-9E3B1D8550EA}" dt="2024-11-30T08:39:06.488" v="1"/>
-          <ac:spMkLst>
-            <pc:docMk/>
-            <pc:sldMk cId="0" sldId="270"/>
-            <ac:spMk id="177" creationId="{EC4A35FB-08B5-7E68-C414-DBAAE1E241EC}"/>
-          </ac:spMkLst>
-        </pc:spChg>
-        <pc:spChg chg="add mod">
-          <ac:chgData name="Susana Vásquez" userId="dffc548e-2323-4ffc-a8aa-757e426c1faa" providerId="ADAL" clId="{CDF94FC1-676E-47EB-A349-9E3B1D8550EA}" dt="2024-11-30T08:39:06.488" v="1"/>
-          <ac:spMkLst>
-            <pc:docMk/>
-            <pc:sldMk cId="0" sldId="270"/>
-            <ac:spMk id="178" creationId="{DB13CD61-6CEE-2559-23BB-C062F1AE11A9}"/>
-          </ac:spMkLst>
-        </pc:spChg>
-        <pc:spChg chg="mod">
-          <ac:chgData name="Susana Vásquez" userId="dffc548e-2323-4ffc-a8aa-757e426c1faa" providerId="ADAL" clId="{CDF94FC1-676E-47EB-A349-9E3B1D8550EA}" dt="2024-11-30T08:39:06.488" v="1"/>
-          <ac:spMkLst>
-            <pc:docMk/>
-            <pc:sldMk cId="0" sldId="270"/>
-            <ac:spMk id="180" creationId="{71D15120-9E20-694A-C859-BAC049C43C73}"/>
-          </ac:spMkLst>
-        </pc:spChg>
-        <pc:spChg chg="mod">
-          <ac:chgData name="Susana Vásquez" userId="dffc548e-2323-4ffc-a8aa-757e426c1faa" providerId="ADAL" clId="{CDF94FC1-676E-47EB-A349-9E3B1D8550EA}" dt="2024-11-30T08:39:06.488" v="1"/>
-          <ac:spMkLst>
-            <pc:docMk/>
-            <pc:sldMk cId="0" sldId="270"/>
-            <ac:spMk id="181" creationId="{D86AB75E-7F2F-1144-E4AF-04E3D524E052}"/>
-          </ac:spMkLst>
-        </pc:spChg>
-        <pc:spChg chg="mod">
-          <ac:chgData name="Susana Vásquez" userId="dffc548e-2323-4ffc-a8aa-757e426c1faa" providerId="ADAL" clId="{CDF94FC1-676E-47EB-A349-9E3B1D8550EA}" dt="2024-11-30T08:39:06.488" v="1"/>
-          <ac:spMkLst>
-            <pc:docMk/>
-            <pc:sldMk cId="0" sldId="270"/>
-            <ac:spMk id="184" creationId="{C9E768AA-FB3A-C727-4142-6971F87A3831}"/>
-          </ac:spMkLst>
-        </pc:spChg>
-        <pc:spChg chg="mod">
-          <ac:chgData name="Susana Vásquez" userId="dffc548e-2323-4ffc-a8aa-757e426c1faa" providerId="ADAL" clId="{CDF94FC1-676E-47EB-A349-9E3B1D8550EA}" dt="2024-11-30T08:39:06.488" v="1"/>
-          <ac:spMkLst>
-            <pc:docMk/>
-            <pc:sldMk cId="0" sldId="270"/>
-            <ac:spMk id="185" creationId="{95567718-91C1-F48F-DE13-89F8999F9C29}"/>
-          </ac:spMkLst>
-        </pc:spChg>
-        <pc:spChg chg="mod">
-          <ac:chgData name="Susana Vásquez" userId="dffc548e-2323-4ffc-a8aa-757e426c1faa" providerId="ADAL" clId="{CDF94FC1-676E-47EB-A349-9E3B1D8550EA}" dt="2024-11-30T08:39:06.488" v="1"/>
-          <ac:spMkLst>
-            <pc:docMk/>
-            <pc:sldMk cId="0" sldId="270"/>
-            <ac:spMk id="188" creationId="{A20555BB-EC3A-68C3-5F6C-2EA01EAB9F6E}"/>
-          </ac:spMkLst>
-        </pc:spChg>
-        <pc:spChg chg="mod">
-          <ac:chgData name="Susana Vásquez" userId="dffc548e-2323-4ffc-a8aa-757e426c1faa" providerId="ADAL" clId="{CDF94FC1-676E-47EB-A349-9E3B1D8550EA}" dt="2024-11-30T08:39:06.488" v="1"/>
-          <ac:spMkLst>
-            <pc:docMk/>
-            <pc:sldMk cId="0" sldId="270"/>
-            <ac:spMk id="189" creationId="{03BE7FB8-A832-1C88-7BD4-AF7180A95505}"/>
-          </ac:spMkLst>
-        </pc:spChg>
-        <pc:spChg chg="mod">
-          <ac:chgData name="Susana Vásquez" userId="dffc548e-2323-4ffc-a8aa-757e426c1faa" providerId="ADAL" clId="{CDF94FC1-676E-47EB-A349-9E3B1D8550EA}" dt="2024-11-30T08:39:06.488" v="1"/>
-          <ac:spMkLst>
-            <pc:docMk/>
-            <pc:sldMk cId="0" sldId="270"/>
-            <ac:spMk id="190" creationId="{B95A90E1-2FD6-0D1A-5A09-0E9D0D401578}"/>
-          </ac:spMkLst>
-        </pc:spChg>
-        <pc:spChg chg="add mod">
-          <ac:chgData name="Susana Vásquez" userId="dffc548e-2323-4ffc-a8aa-757e426c1faa" providerId="ADAL" clId="{CDF94FC1-676E-47EB-A349-9E3B1D8550EA}" dt="2024-11-30T08:39:06.488" v="1"/>
-          <ac:spMkLst>
-            <pc:docMk/>
-            <pc:sldMk cId="0" sldId="270"/>
-            <ac:spMk id="191" creationId="{585E7159-5015-C86B-2DEC-A019749DF4EB}"/>
-          </ac:spMkLst>
-        </pc:spChg>
-        <pc:spChg chg="add mod">
-          <ac:chgData name="Susana Vásquez" userId="dffc548e-2323-4ffc-a8aa-757e426c1faa" providerId="ADAL" clId="{CDF94FC1-676E-47EB-A349-9E3B1D8550EA}" dt="2024-11-30T08:39:06.488" v="1"/>
-          <ac:spMkLst>
-            <pc:docMk/>
-            <pc:sldMk cId="0" sldId="270"/>
-            <ac:spMk id="192" creationId="{630B4BAC-77F0-9104-B29D-C407D266A7BF}"/>
-          </ac:spMkLst>
-        </pc:spChg>
-        <pc:spChg chg="add mod">
-          <ac:chgData name="Susana Vásquez" userId="dffc548e-2323-4ffc-a8aa-757e426c1faa" providerId="ADAL" clId="{CDF94FC1-676E-47EB-A349-9E3B1D8550EA}" dt="2024-11-30T08:39:06.488" v="1"/>
-          <ac:spMkLst>
-            <pc:docMk/>
-            <pc:sldMk cId="0" sldId="270"/>
-            <ac:spMk id="193" creationId="{1C54DEFF-74DB-1CB3-D827-FA4CD1419B6B}"/>
-          </ac:spMkLst>
-        </pc:spChg>
-        <pc:spChg chg="add mod">
-          <ac:chgData name="Susana Vásquez" userId="dffc548e-2323-4ffc-a8aa-757e426c1faa" providerId="ADAL" clId="{CDF94FC1-676E-47EB-A349-9E3B1D8550EA}" dt="2024-11-30T08:39:06.488" v="1"/>
-          <ac:spMkLst>
-            <pc:docMk/>
-            <pc:sldMk cId="0" sldId="270"/>
-            <ac:spMk id="194" creationId="{FC6E7A72-4FF2-3271-0E83-944505E5DDE9}"/>
-          </ac:spMkLst>
-        </pc:spChg>
-        <pc:spChg chg="add mod">
-          <ac:chgData name="Susana Vásquez" userId="dffc548e-2323-4ffc-a8aa-757e426c1faa" providerId="ADAL" clId="{CDF94FC1-676E-47EB-A349-9E3B1D8550EA}" dt="2024-11-30T08:39:06.488" v="1"/>
-          <ac:spMkLst>
-            <pc:docMk/>
-            <pc:sldMk cId="0" sldId="270"/>
-            <ac:spMk id="195" creationId="{C4788C40-F7CC-303B-2EFA-F449B38AAE1B}"/>
-          </ac:spMkLst>
-        </pc:spChg>
-        <pc:spChg chg="add mod">
-          <ac:chgData name="Susana Vásquez" userId="dffc548e-2323-4ffc-a8aa-757e426c1faa" providerId="ADAL" clId="{CDF94FC1-676E-47EB-A349-9E3B1D8550EA}" dt="2024-11-30T08:39:06.488" v="1"/>
-          <ac:spMkLst>
-            <pc:docMk/>
-            <pc:sldMk cId="0" sldId="270"/>
-            <ac:spMk id="196" creationId="{E8F135E8-7EE4-B8EB-05EE-FE3441D4AB67}"/>
-          </ac:spMkLst>
-        </pc:spChg>
-        <pc:spChg chg="add mod">
-          <ac:chgData name="Susana Vásquez" userId="dffc548e-2323-4ffc-a8aa-757e426c1faa" providerId="ADAL" clId="{CDF94FC1-676E-47EB-A349-9E3B1D8550EA}" dt="2024-11-30T08:39:06.488" v="1"/>
-          <ac:spMkLst>
-            <pc:docMk/>
-            <pc:sldMk cId="0" sldId="270"/>
-            <ac:spMk id="197" creationId="{78EC2C65-71AA-8DB8-462F-AC8C07BDD6DD}"/>
-          </ac:spMkLst>
-        </pc:spChg>
-        <pc:spChg chg="add mod">
-          <ac:chgData name="Susana Vásquez" userId="dffc548e-2323-4ffc-a8aa-757e426c1faa" providerId="ADAL" clId="{CDF94FC1-676E-47EB-A349-9E3B1D8550EA}" dt="2024-11-30T08:39:06.488" v="1"/>
-          <ac:spMkLst>
-            <pc:docMk/>
-            <pc:sldMk cId="0" sldId="270"/>
-            <ac:spMk id="198" creationId="{C5C8A244-DFE1-8DE0-36FD-B1A9025B548C}"/>
-          </ac:spMkLst>
-        </pc:spChg>
-        <pc:spChg chg="add mod">
-          <ac:chgData name="Susana Vásquez" userId="dffc548e-2323-4ffc-a8aa-757e426c1faa" providerId="ADAL" clId="{CDF94FC1-676E-47EB-A349-9E3B1D8550EA}" dt="2024-11-30T08:39:06.488" v="1"/>
-          <ac:spMkLst>
-            <pc:docMk/>
-            <pc:sldMk cId="0" sldId="270"/>
-            <ac:spMk id="199" creationId="{4501F22C-3BD4-3A12-03BA-5E7ADC10E1A9}"/>
-          </ac:spMkLst>
-        </pc:spChg>
-        <pc:spChg chg="add mod">
-          <ac:chgData name="Susana Vásquez" userId="dffc548e-2323-4ffc-a8aa-757e426c1faa" providerId="ADAL" clId="{CDF94FC1-676E-47EB-A349-9E3B1D8550EA}" dt="2024-11-30T08:39:06.488" v="1"/>
-          <ac:spMkLst>
-            <pc:docMk/>
-            <pc:sldMk cId="0" sldId="270"/>
-            <ac:spMk id="200" creationId="{18A3D8BA-E70F-77D9-FFC8-E34182196ED6}"/>
-          </ac:spMkLst>
-        </pc:spChg>
-        <pc:spChg chg="add mod">
-          <ac:chgData name="Susana Vásquez" userId="dffc548e-2323-4ffc-a8aa-757e426c1faa" providerId="ADAL" clId="{CDF94FC1-676E-47EB-A349-9E3B1D8550EA}" dt="2024-11-30T08:39:06.488" v="1"/>
-          <ac:spMkLst>
-            <pc:docMk/>
-            <pc:sldMk cId="0" sldId="270"/>
-            <ac:spMk id="201" creationId="{AC512AB7-1C08-66D4-61E6-3C7DB36EE772}"/>
-          </ac:spMkLst>
-        </pc:spChg>
-        <pc:spChg chg="add mod">
-          <ac:chgData name="Susana Vásquez" userId="dffc548e-2323-4ffc-a8aa-757e426c1faa" providerId="ADAL" clId="{CDF94FC1-676E-47EB-A349-9E3B1D8550EA}" dt="2024-11-30T08:39:06.488" v="1"/>
-          <ac:spMkLst>
-            <pc:docMk/>
-            <pc:sldMk cId="0" sldId="270"/>
-            <ac:spMk id="202" creationId="{013477BC-606C-8B22-1A00-CF757818EFD1}"/>
-          </ac:spMkLst>
-        </pc:spChg>
-        <pc:spChg chg="mod">
-          <ac:chgData name="Susana Vásquez" userId="dffc548e-2323-4ffc-a8aa-757e426c1faa" providerId="ADAL" clId="{CDF94FC1-676E-47EB-A349-9E3B1D8550EA}" dt="2024-11-30T08:39:06.488" v="1"/>
-          <ac:spMkLst>
-            <pc:docMk/>
-            <pc:sldMk cId="0" sldId="270"/>
-            <ac:spMk id="204" creationId="{79C12934-1953-8073-CAC5-83EC07D2EB8A}"/>
-          </ac:spMkLst>
-        </pc:spChg>
-        <pc:spChg chg="add mod">
-          <ac:chgData name="Susana Vásquez" userId="dffc548e-2323-4ffc-a8aa-757e426c1faa" providerId="ADAL" clId="{CDF94FC1-676E-47EB-A349-9E3B1D8550EA}" dt="2024-11-30T08:39:06.488" v="1"/>
-          <ac:spMkLst>
-            <pc:docMk/>
-            <pc:sldMk cId="0" sldId="270"/>
-            <ac:spMk id="205" creationId="{7F6C5105-791B-B6F5-734E-653A520815B8}"/>
-          </ac:spMkLst>
-        </pc:spChg>
-        <pc:spChg chg="add mod">
-          <ac:chgData name="Susana Vásquez" userId="dffc548e-2323-4ffc-a8aa-757e426c1faa" providerId="ADAL" clId="{CDF94FC1-676E-47EB-A349-9E3B1D8550EA}" dt="2024-11-30T08:39:06.488" v="1"/>
-          <ac:spMkLst>
-            <pc:docMk/>
-            <pc:sldMk cId="0" sldId="270"/>
-            <ac:spMk id="206" creationId="{844EB139-6086-F053-4541-DBD90C7CC66C}"/>
-          </ac:spMkLst>
-        </pc:spChg>
-        <pc:spChg chg="add mod">
-          <ac:chgData name="Susana Vásquez" userId="dffc548e-2323-4ffc-a8aa-757e426c1faa" providerId="ADAL" clId="{CDF94FC1-676E-47EB-A349-9E3B1D8550EA}" dt="2024-11-30T08:39:06.488" v="1"/>
-          <ac:spMkLst>
-            <pc:docMk/>
-            <pc:sldMk cId="0" sldId="270"/>
-            <ac:spMk id="207" creationId="{852CEEE9-802B-8867-53D2-095E98B3A39D}"/>
-          </ac:spMkLst>
-        </pc:spChg>
-        <pc:spChg chg="add mod">
-          <ac:chgData name="Susana Vásquez" userId="dffc548e-2323-4ffc-a8aa-757e426c1faa" providerId="ADAL" clId="{CDF94FC1-676E-47EB-A349-9E3B1D8550EA}" dt="2024-11-30T08:39:06.488" v="1"/>
-          <ac:spMkLst>
-            <pc:docMk/>
-            <pc:sldMk cId="0" sldId="270"/>
-            <ac:spMk id="208" creationId="{17FFE33E-A547-B486-8CF3-86E56FAEB4B5}"/>
-          </ac:spMkLst>
-        </pc:spChg>
-        <pc:spChg chg="add mod">
-          <ac:chgData name="Susana Vásquez" userId="dffc548e-2323-4ffc-a8aa-757e426c1faa" providerId="ADAL" clId="{CDF94FC1-676E-47EB-A349-9E3B1D8550EA}" dt="2024-11-30T08:39:06.488" v="1"/>
-          <ac:spMkLst>
-            <pc:docMk/>
-            <pc:sldMk cId="0" sldId="270"/>
-            <ac:spMk id="209" creationId="{DDA2B504-4E3B-FE9D-552E-EB322021C9E4}"/>
-          </ac:spMkLst>
-        </pc:spChg>
-        <pc:spChg chg="add mod">
-          <ac:chgData name="Susana Vásquez" userId="dffc548e-2323-4ffc-a8aa-757e426c1faa" providerId="ADAL" clId="{CDF94FC1-676E-47EB-A349-9E3B1D8550EA}" dt="2024-11-30T08:39:06.488" v="1"/>
-          <ac:spMkLst>
-            <pc:docMk/>
-            <pc:sldMk cId="0" sldId="270"/>
-            <ac:spMk id="210" creationId="{0623AC41-3F03-B601-7A2E-E4FECE3B5DA5}"/>
-          </ac:spMkLst>
-        </pc:spChg>
-        <pc:spChg chg="add mod">
-          <ac:chgData name="Susana Vásquez" userId="dffc548e-2323-4ffc-a8aa-757e426c1faa" providerId="ADAL" clId="{CDF94FC1-676E-47EB-A349-9E3B1D8550EA}" dt="2024-11-30T08:39:06.488" v="1"/>
-          <ac:spMkLst>
-            <pc:docMk/>
-            <pc:sldMk cId="0" sldId="270"/>
-            <ac:spMk id="211" creationId="{75922A35-3E69-5C37-D589-D34757C06106}"/>
-          </ac:spMkLst>
-        </pc:spChg>
-        <pc:spChg chg="add mod">
-          <ac:chgData name="Susana Vásquez" userId="dffc548e-2323-4ffc-a8aa-757e426c1faa" providerId="ADAL" clId="{CDF94FC1-676E-47EB-A349-9E3B1D8550EA}" dt="2024-11-30T08:39:06.488" v="1"/>
-          <ac:spMkLst>
-            <pc:docMk/>
-            <pc:sldMk cId="0" sldId="270"/>
-            <ac:spMk id="212" creationId="{D0240DA4-0A0C-3F7C-FC97-BF2F855B1211}"/>
-          </ac:spMkLst>
-        </pc:spChg>
-        <pc:spChg chg="add mod">
-          <ac:chgData name="Susana Vásquez" userId="dffc548e-2323-4ffc-a8aa-757e426c1faa" providerId="ADAL" clId="{CDF94FC1-676E-47EB-A349-9E3B1D8550EA}" dt="2024-11-30T08:39:06.488" v="1"/>
-          <ac:spMkLst>
-            <pc:docMk/>
-            <pc:sldMk cId="0" sldId="270"/>
-            <ac:spMk id="213" creationId="{8F41651A-3158-5B22-951C-284C35C8631C}"/>
-          </ac:spMkLst>
-        </pc:spChg>
-        <pc:spChg chg="add mod">
-          <ac:chgData name="Susana Vásquez" userId="dffc548e-2323-4ffc-a8aa-757e426c1faa" providerId="ADAL" clId="{CDF94FC1-676E-47EB-A349-9E3B1D8550EA}" dt="2024-11-30T08:39:06.488" v="1"/>
-          <ac:spMkLst>
-            <pc:docMk/>
-            <pc:sldMk cId="0" sldId="270"/>
-            <ac:spMk id="214" creationId="{6DBEFEC7-2D4B-A348-3B09-EC59F85B3F6C}"/>
-          </ac:spMkLst>
-        </pc:spChg>
-        <pc:spChg chg="add mod">
-          <ac:chgData name="Susana Vásquez" userId="dffc548e-2323-4ffc-a8aa-757e426c1faa" providerId="ADAL" clId="{CDF94FC1-676E-47EB-A349-9E3B1D8550EA}" dt="2024-11-30T08:39:06.488" v="1"/>
-          <ac:spMkLst>
-            <pc:docMk/>
-            <pc:sldMk cId="0" sldId="270"/>
-            <ac:spMk id="215" creationId="{587509FC-6267-BBB9-9C0D-E6E9F7626656}"/>
-          </ac:spMkLst>
-        </pc:spChg>
-        <pc:spChg chg="add mod">
-          <ac:chgData name="Susana Vásquez" userId="dffc548e-2323-4ffc-a8aa-757e426c1faa" providerId="ADAL" clId="{CDF94FC1-676E-47EB-A349-9E3B1D8550EA}" dt="2024-11-30T08:39:06.488" v="1"/>
-          <ac:spMkLst>
-            <pc:docMk/>
-            <pc:sldMk cId="0" sldId="270"/>
-            <ac:spMk id="216" creationId="{6AF51C8C-94E8-860E-E1EE-21F278E1DB46}"/>
-          </ac:spMkLst>
-        </pc:spChg>
-        <pc:spChg chg="add mod">
-          <ac:chgData name="Susana Vásquez" userId="dffc548e-2323-4ffc-a8aa-757e426c1faa" providerId="ADAL" clId="{CDF94FC1-676E-47EB-A349-9E3B1D8550EA}" dt="2024-11-30T08:39:06.488" v="1"/>
-          <ac:spMkLst>
-            <pc:docMk/>
-            <pc:sldMk cId="0" sldId="270"/>
-            <ac:spMk id="217" creationId="{CC0FF208-3ECB-7B67-EC20-316ABFE66B92}"/>
-          </ac:spMkLst>
-        </pc:spChg>
-        <pc:spChg chg="add mod">
-          <ac:chgData name="Susana Vásquez" userId="dffc548e-2323-4ffc-a8aa-757e426c1faa" providerId="ADAL" clId="{CDF94FC1-676E-47EB-A349-9E3B1D8550EA}" dt="2024-11-30T08:39:06.488" v="1"/>
-          <ac:spMkLst>
-            <pc:docMk/>
-            <pc:sldMk cId="0" sldId="270"/>
-            <ac:spMk id="218" creationId="{9B2F9F91-3259-8EA1-14B1-7C9944CD7F3F}"/>
-          </ac:spMkLst>
-        </pc:spChg>
-        <pc:spChg chg="add mod">
-          <ac:chgData name="Susana Vásquez" userId="dffc548e-2323-4ffc-a8aa-757e426c1faa" providerId="ADAL" clId="{CDF94FC1-676E-47EB-A349-9E3B1D8550EA}" dt="2024-11-30T08:39:06.488" v="1"/>
-          <ac:spMkLst>
-            <pc:docMk/>
-            <pc:sldMk cId="0" sldId="270"/>
-            <ac:spMk id="219" creationId="{CE4F1FEE-BD25-E021-C2F0-929FD274146F}"/>
-          </ac:spMkLst>
-        </pc:spChg>
-        <pc:spChg chg="add mod">
-          <ac:chgData name="Susana Vásquez" userId="dffc548e-2323-4ffc-a8aa-757e426c1faa" providerId="ADAL" clId="{CDF94FC1-676E-47EB-A349-9E3B1D8550EA}" dt="2024-11-30T08:39:06.488" v="1"/>
-          <ac:spMkLst>
-            <pc:docMk/>
-            <pc:sldMk cId="0" sldId="270"/>
-            <ac:spMk id="220" creationId="{890FD1C3-7D89-39EE-CD5D-A401BB7B8CF7}"/>
-          </ac:spMkLst>
-        </pc:spChg>
-        <pc:spChg chg="add mod">
-          <ac:chgData name="Susana Vásquez" userId="dffc548e-2323-4ffc-a8aa-757e426c1faa" providerId="ADAL" clId="{CDF94FC1-676E-47EB-A349-9E3B1D8550EA}" dt="2024-11-30T08:39:06.488" v="1"/>
-          <ac:spMkLst>
-            <pc:docMk/>
-            <pc:sldMk cId="0" sldId="270"/>
-            <ac:spMk id="221" creationId="{02C4F94A-3583-B9F9-F9BA-E34EB2DB73A7}"/>
-          </ac:spMkLst>
-        </pc:spChg>
-        <pc:spChg chg="add mod">
-          <ac:chgData name="Susana Vásquez" userId="dffc548e-2323-4ffc-a8aa-757e426c1faa" providerId="ADAL" clId="{CDF94FC1-676E-47EB-A349-9E3B1D8550EA}" dt="2024-11-30T08:39:06.488" v="1"/>
-          <ac:spMkLst>
-            <pc:docMk/>
-            <pc:sldMk cId="0" sldId="270"/>
-            <ac:spMk id="222" creationId="{EB0BB578-EFE7-4B4A-E89C-7CCA298A77A5}"/>
-          </ac:spMkLst>
-        </pc:spChg>
-        <pc:spChg chg="add mod">
-          <ac:chgData name="Susana Vásquez" userId="dffc548e-2323-4ffc-a8aa-757e426c1faa" providerId="ADAL" clId="{CDF94FC1-676E-47EB-A349-9E3B1D8550EA}" dt="2024-11-30T08:39:06.488" v="1"/>
-          <ac:spMkLst>
-            <pc:docMk/>
-            <pc:sldMk cId="0" sldId="270"/>
-            <ac:spMk id="223" creationId="{E8F77ED6-03FF-1D39-BDFE-B38B5E71C843}"/>
-          </ac:spMkLst>
-        </pc:spChg>
-        <pc:spChg chg="add mod">
-          <ac:chgData name="Susana Vásquez" userId="dffc548e-2323-4ffc-a8aa-757e426c1faa" providerId="ADAL" clId="{CDF94FC1-676E-47EB-A349-9E3B1D8550EA}" dt="2024-11-30T08:39:06.488" v="1"/>
-          <ac:spMkLst>
-            <pc:docMk/>
-            <pc:sldMk cId="0" sldId="270"/>
-            <ac:spMk id="224" creationId="{1DBEF905-1766-4AAD-B368-F9840E49F348}"/>
-          </ac:spMkLst>
-        </pc:spChg>
-        <pc:spChg chg="add mod">
-          <ac:chgData name="Susana Vásquez" userId="dffc548e-2323-4ffc-a8aa-757e426c1faa" providerId="ADAL" clId="{CDF94FC1-676E-47EB-A349-9E3B1D8550EA}" dt="2024-11-30T08:39:06.488" v="1"/>
-          <ac:spMkLst>
-            <pc:docMk/>
-            <pc:sldMk cId="0" sldId="270"/>
-            <ac:spMk id="225" creationId="{B647C3CD-B95B-38E9-4B44-99C9FB2CBE4E}"/>
-          </ac:spMkLst>
-        </pc:spChg>
-        <pc:spChg chg="add mod">
-          <ac:chgData name="Susana Vásquez" userId="dffc548e-2323-4ffc-a8aa-757e426c1faa" providerId="ADAL" clId="{CDF94FC1-676E-47EB-A349-9E3B1D8550EA}" dt="2024-11-30T08:39:06.488" v="1"/>
-          <ac:spMkLst>
-            <pc:docMk/>
-            <pc:sldMk cId="0" sldId="270"/>
-            <ac:spMk id="226" creationId="{151CE01A-BA60-652D-796C-5514E1847215}"/>
-          </ac:spMkLst>
-        </pc:spChg>
-        <pc:spChg chg="add mod">
-          <ac:chgData name="Susana Vásquez" userId="dffc548e-2323-4ffc-a8aa-757e426c1faa" providerId="ADAL" clId="{CDF94FC1-676E-47EB-A349-9E3B1D8550EA}" dt="2024-11-30T08:39:06.488" v="1"/>
-          <ac:spMkLst>
-            <pc:docMk/>
-            <pc:sldMk cId="0" sldId="270"/>
-            <ac:spMk id="227" creationId="{E96C879C-587E-2C4A-77FE-24A0E641A040}"/>
-          </ac:spMkLst>
-        </pc:spChg>
-        <pc:spChg chg="add mod">
-          <ac:chgData name="Susana Vásquez" userId="dffc548e-2323-4ffc-a8aa-757e426c1faa" providerId="ADAL" clId="{CDF94FC1-676E-47EB-A349-9E3B1D8550EA}" dt="2024-11-30T08:39:06.488" v="1"/>
-          <ac:spMkLst>
-            <pc:docMk/>
-            <pc:sldMk cId="0" sldId="270"/>
-            <ac:spMk id="228" creationId="{65232AB3-64CC-95ED-2536-FF7D5EF7FD79}"/>
-          </ac:spMkLst>
-        </pc:spChg>
-        <pc:spChg chg="add mod">
-          <ac:chgData name="Susana Vásquez" userId="dffc548e-2323-4ffc-a8aa-757e426c1faa" providerId="ADAL" clId="{CDF94FC1-676E-47EB-A349-9E3B1D8550EA}" dt="2024-11-30T08:39:06.488" v="1"/>
-          <ac:spMkLst>
-            <pc:docMk/>
-            <pc:sldMk cId="0" sldId="270"/>
-            <ac:spMk id="229" creationId="{C9B0702A-2B28-2289-47AF-A9C7AA610A57}"/>
-          </ac:spMkLst>
-        </pc:spChg>
-        <pc:spChg chg="add mod">
-          <ac:chgData name="Susana Vásquez" userId="dffc548e-2323-4ffc-a8aa-757e426c1faa" providerId="ADAL" clId="{CDF94FC1-676E-47EB-A349-9E3B1D8550EA}" dt="2024-11-30T08:39:06.488" v="1"/>
-          <ac:spMkLst>
-            <pc:docMk/>
-            <pc:sldMk cId="0" sldId="270"/>
-            <ac:spMk id="230" creationId="{019A9C3E-A76B-780A-F017-D8C7E4488739}"/>
-          </ac:spMkLst>
-        </pc:spChg>
-        <pc:spChg chg="add mod">
-          <ac:chgData name="Susana Vásquez" userId="dffc548e-2323-4ffc-a8aa-757e426c1faa" providerId="ADAL" clId="{CDF94FC1-676E-47EB-A349-9E3B1D8550EA}" dt="2024-11-30T08:39:06.488" v="1"/>
-          <ac:spMkLst>
-            <pc:docMk/>
-            <pc:sldMk cId="0" sldId="270"/>
-            <ac:spMk id="231" creationId="{CDC70BB6-E80C-92EC-098A-9762A0E1DB6A}"/>
-          </ac:spMkLst>
-        </pc:spChg>
-        <pc:spChg chg="add mod">
-          <ac:chgData name="Susana Vásquez" userId="dffc548e-2323-4ffc-a8aa-757e426c1faa" providerId="ADAL" clId="{CDF94FC1-676E-47EB-A349-9E3B1D8550EA}" dt="2024-11-30T08:39:06.488" v="1"/>
-          <ac:spMkLst>
-            <pc:docMk/>
-            <pc:sldMk cId="0" sldId="270"/>
-            <ac:spMk id="232" creationId="{DBCE89D2-FE62-650D-FCEB-D87283B2E631}"/>
-          </ac:spMkLst>
-        </pc:spChg>
-        <pc:spChg chg="add mod">
-          <ac:chgData name="Susana Vásquez" userId="dffc548e-2323-4ffc-a8aa-757e426c1faa" providerId="ADAL" clId="{CDF94FC1-676E-47EB-A349-9E3B1D8550EA}" dt="2024-11-30T08:39:06.488" v="1"/>
-          <ac:spMkLst>
-            <pc:docMk/>
-            <pc:sldMk cId="0" sldId="270"/>
-            <ac:spMk id="233" creationId="{2D674BB8-A6BD-3409-AD76-70523146791D}"/>
-          </ac:spMkLst>
-        </pc:spChg>
-        <pc:spChg chg="add mod">
-          <ac:chgData name="Susana Vásquez" userId="dffc548e-2323-4ffc-a8aa-757e426c1faa" providerId="ADAL" clId="{CDF94FC1-676E-47EB-A349-9E3B1D8550EA}" dt="2024-11-30T08:39:06.488" v="1"/>
-          <ac:spMkLst>
-            <pc:docMk/>
-            <pc:sldMk cId="0" sldId="270"/>
-            <ac:spMk id="234" creationId="{0A3123EF-A60C-A9F9-213E-F85887D83881}"/>
-          </ac:spMkLst>
-        </pc:spChg>
-        <pc:spChg chg="add mod">
-          <ac:chgData name="Susana Vásquez" userId="dffc548e-2323-4ffc-a8aa-757e426c1faa" providerId="ADAL" clId="{CDF94FC1-676E-47EB-A349-9E3B1D8550EA}" dt="2024-11-30T08:39:06.488" v="1"/>
-          <ac:spMkLst>
-            <pc:docMk/>
-            <pc:sldMk cId="0" sldId="270"/>
-            <ac:spMk id="235" creationId="{13AF1DE4-4E1D-585E-F855-B2420BC58E3B}"/>
-          </ac:spMkLst>
-        </pc:spChg>
-        <pc:spChg chg="add mod">
-          <ac:chgData name="Susana Vásquez" userId="dffc548e-2323-4ffc-a8aa-757e426c1faa" providerId="ADAL" clId="{CDF94FC1-676E-47EB-A349-9E3B1D8550EA}" dt="2024-11-30T08:39:06.488" v="1"/>
-          <ac:spMkLst>
-            <pc:docMk/>
-            <pc:sldMk cId="0" sldId="270"/>
-            <ac:spMk id="236" creationId="{229D1FFC-BC16-ABFE-2EE1-EA797A7B5AFA}"/>
-          </ac:spMkLst>
-        </pc:spChg>
-        <pc:spChg chg="add mod">
-          <ac:chgData name="Susana Vásquez" userId="dffc548e-2323-4ffc-a8aa-757e426c1faa" providerId="ADAL" clId="{CDF94FC1-676E-47EB-A349-9E3B1D8550EA}" dt="2024-11-30T08:39:06.488" v="1"/>
-          <ac:spMkLst>
-            <pc:docMk/>
-            <pc:sldMk cId="0" sldId="270"/>
-            <ac:spMk id="237" creationId="{73F2DCB2-2789-43A2-FFF9-CEDD326A0C16}"/>
-          </ac:spMkLst>
-        </pc:spChg>
-        <pc:spChg chg="add mod">
-          <ac:chgData name="Susana Vásquez" userId="dffc548e-2323-4ffc-a8aa-757e426c1faa" providerId="ADAL" clId="{CDF94FC1-676E-47EB-A349-9E3B1D8550EA}" dt="2024-11-30T08:39:06.488" v="1"/>
-          <ac:spMkLst>
-            <pc:docMk/>
-            <pc:sldMk cId="0" sldId="270"/>
-            <ac:spMk id="238" creationId="{D450CA47-9309-EB07-7097-9ACA6D6F24DF}"/>
-          </ac:spMkLst>
-        </pc:spChg>
-        <pc:spChg chg="add mod">
-          <ac:chgData name="Susana Vásquez" userId="dffc548e-2323-4ffc-a8aa-757e426c1faa" providerId="ADAL" clId="{CDF94FC1-676E-47EB-A349-9E3B1D8550EA}" dt="2024-11-30T08:39:06.488" v="1"/>
-          <ac:spMkLst>
-            <pc:docMk/>
-            <pc:sldMk cId="0" sldId="270"/>
-            <ac:spMk id="239" creationId="{AE827021-911D-598C-563E-A85A5A65AC11}"/>
-          </ac:spMkLst>
-        </pc:spChg>
-        <pc:grpChg chg="add mod">
-          <ac:chgData name="Susana Vásquez" userId="dffc548e-2323-4ffc-a8aa-757e426c1faa" providerId="ADAL" clId="{CDF94FC1-676E-47EB-A349-9E3B1D8550EA}" dt="2024-11-30T08:39:06.488" v="1"/>
-          <ac:grpSpMkLst>
-            <pc:docMk/>
-            <pc:sldMk cId="0" sldId="270"/>
-            <ac:grpSpMk id="128" creationId="{20C80062-6D9A-613C-E171-0AADEADA56EE}"/>
-          </ac:grpSpMkLst>
-        </pc:grpChg>
-        <pc:grpChg chg="add mod">
-          <ac:chgData name="Susana Vásquez" userId="dffc548e-2323-4ffc-a8aa-757e426c1faa" providerId="ADAL" clId="{CDF94FC1-676E-47EB-A349-9E3B1D8550EA}" dt="2024-11-30T08:39:06.488" v="1"/>
-          <ac:grpSpMkLst>
-            <pc:docMk/>
-            <pc:sldMk cId="0" sldId="270"/>
-            <ac:grpSpMk id="132" creationId="{ED9C6BC7-5664-E6FF-335C-E32977574EB3}"/>
-          </ac:grpSpMkLst>
-        </pc:grpChg>
-        <pc:grpChg chg="add mod">
-          <ac:chgData name="Susana Vásquez" userId="dffc548e-2323-4ffc-a8aa-757e426c1faa" providerId="ADAL" clId="{CDF94FC1-676E-47EB-A349-9E3B1D8550EA}" dt="2024-11-30T08:39:06.488" v="1"/>
-          <ac:grpSpMkLst>
-            <pc:docMk/>
-            <pc:sldMk cId="0" sldId="270"/>
-            <ac:grpSpMk id="136" creationId="{115AC081-C85E-EFC3-3230-702BA857962F}"/>
-          </ac:grpSpMkLst>
-        </pc:grpChg>
-        <pc:grpChg chg="mod">
-          <ac:chgData name="Susana Vásquez" userId="dffc548e-2323-4ffc-a8aa-757e426c1faa" providerId="ADAL" clId="{CDF94FC1-676E-47EB-A349-9E3B1D8550EA}" dt="2024-11-30T08:39:06.488" v="1"/>
-          <ac:grpSpMkLst>
-            <pc:docMk/>
-            <pc:sldMk cId="0" sldId="270"/>
-            <ac:grpSpMk id="137" creationId="{1FE02E33-4062-A6E9-D868-7E74F7B84BF2}"/>
-          </ac:grpSpMkLst>
-        </pc:grpChg>
-        <pc:grpChg chg="add mod">
-          <ac:chgData name="Susana Vásquez" userId="dffc548e-2323-4ffc-a8aa-757e426c1faa" providerId="ADAL" clId="{CDF94FC1-676E-47EB-A349-9E3B1D8550EA}" dt="2024-11-30T08:39:06.488" v="1"/>
-          <ac:grpSpMkLst>
-            <pc:docMk/>
-            <pc:sldMk cId="0" sldId="270"/>
-            <ac:grpSpMk id="140" creationId="{F2C87F28-FBCE-622D-AD2A-9F5FAE019D2A}"/>
-          </ac:grpSpMkLst>
-        </pc:grpChg>
-        <pc:grpChg chg="add mod">
-          <ac:chgData name="Susana Vásquez" userId="dffc548e-2323-4ffc-a8aa-757e426c1faa" providerId="ADAL" clId="{CDF94FC1-676E-47EB-A349-9E3B1D8550EA}" dt="2024-11-30T08:39:06.488" v="1"/>
-          <ac:grpSpMkLst>
-            <pc:docMk/>
-            <pc:sldMk cId="0" sldId="270"/>
-            <ac:grpSpMk id="143" creationId="{F8202431-3514-B8C9-4ACC-CDDB1B7313E5}"/>
-          </ac:grpSpMkLst>
-        </pc:grpChg>
-        <pc:grpChg chg="add mod">
-          <ac:chgData name="Susana Vásquez" userId="dffc548e-2323-4ffc-a8aa-757e426c1faa" providerId="ADAL" clId="{CDF94FC1-676E-47EB-A349-9E3B1D8550EA}" dt="2024-11-30T08:39:06.488" v="1"/>
-          <ac:grpSpMkLst>
-            <pc:docMk/>
-            <pc:sldMk cId="0" sldId="270"/>
-            <ac:grpSpMk id="147" creationId="{F2120BAC-D317-F2EB-960A-AB8E6A8933F2}"/>
-          </ac:grpSpMkLst>
-        </pc:grpChg>
-        <pc:grpChg chg="add mod">
-          <ac:chgData name="Susana Vásquez" userId="dffc548e-2323-4ffc-a8aa-757e426c1faa" providerId="ADAL" clId="{CDF94FC1-676E-47EB-A349-9E3B1D8550EA}" dt="2024-11-30T08:39:06.488" v="1"/>
-          <ac:grpSpMkLst>
-            <pc:docMk/>
-            <pc:sldMk cId="0" sldId="270"/>
-            <ac:grpSpMk id="150" creationId="{2274D261-ADE0-6440-CD8A-1C5581EC9182}"/>
-          </ac:grpSpMkLst>
-        </pc:grpChg>
-        <pc:grpChg chg="mod">
-          <ac:chgData name="Susana Vásquez" userId="dffc548e-2323-4ffc-a8aa-757e426c1faa" providerId="ADAL" clId="{CDF94FC1-676E-47EB-A349-9E3B1D8550EA}" dt="2024-11-30T08:39:06.488" v="1"/>
-          <ac:grpSpMkLst>
-            <pc:docMk/>
-            <pc:sldMk cId="0" sldId="270"/>
-            <ac:grpSpMk id="151" creationId="{F1B5D381-BDE0-AC62-805B-06328B8F6A3F}"/>
-          </ac:grpSpMkLst>
-        </pc:grpChg>
-        <pc:grpChg chg="add mod">
-          <ac:chgData name="Susana Vásquez" userId="dffc548e-2323-4ffc-a8aa-757e426c1faa" providerId="ADAL" clId="{CDF94FC1-676E-47EB-A349-9E3B1D8550EA}" dt="2024-11-30T08:39:06.488" v="1"/>
-          <ac:grpSpMkLst>
-            <pc:docMk/>
-            <pc:sldMk cId="0" sldId="270"/>
-            <ac:grpSpMk id="154" creationId="{7211DA91-7D20-1FC9-EDDE-DA86AAD108C9}"/>
-          </ac:grpSpMkLst>
-        </pc:grpChg>
-        <pc:grpChg chg="mod">
-          <ac:chgData name="Susana Vásquez" userId="dffc548e-2323-4ffc-a8aa-757e426c1faa" providerId="ADAL" clId="{CDF94FC1-676E-47EB-A349-9E3B1D8550EA}" dt="2024-11-30T08:39:06.488" v="1"/>
-          <ac:grpSpMkLst>
-            <pc:docMk/>
-            <pc:sldMk cId="0" sldId="270"/>
-            <ac:grpSpMk id="155" creationId="{9047A70F-C7BC-BFDE-6E33-827173D1EA47}"/>
-          </ac:grpSpMkLst>
-        </pc:grpChg>
-        <pc:grpChg chg="add mod">
-          <ac:chgData name="Susana Vásquez" userId="dffc548e-2323-4ffc-a8aa-757e426c1faa" providerId="ADAL" clId="{CDF94FC1-676E-47EB-A349-9E3B1D8550EA}" dt="2024-11-30T08:39:06.488" v="1"/>
-          <ac:grpSpMkLst>
-            <pc:docMk/>
-            <pc:sldMk cId="0" sldId="270"/>
-            <ac:grpSpMk id="158" creationId="{EFF39262-616C-912E-F348-D32428AD5E4A}"/>
-          </ac:grpSpMkLst>
-        </pc:grpChg>
-        <pc:grpChg chg="mod">
-          <ac:chgData name="Susana Vásquez" userId="dffc548e-2323-4ffc-a8aa-757e426c1faa" providerId="ADAL" clId="{CDF94FC1-676E-47EB-A349-9E3B1D8550EA}" dt="2024-11-30T08:39:06.488" v="1"/>
-          <ac:grpSpMkLst>
-            <pc:docMk/>
-            <pc:sldMk cId="0" sldId="270"/>
-            <ac:grpSpMk id="159" creationId="{E8FED371-11FD-AB60-BAE1-0C887B79863B}"/>
-          </ac:grpSpMkLst>
-        </pc:grpChg>
-        <pc:grpChg chg="add mod">
-          <ac:chgData name="Susana Vásquez" userId="dffc548e-2323-4ffc-a8aa-757e426c1faa" providerId="ADAL" clId="{CDF94FC1-676E-47EB-A349-9E3B1D8550EA}" dt="2024-11-30T08:39:06.488" v="1"/>
-          <ac:grpSpMkLst>
-            <pc:docMk/>
-            <pc:sldMk cId="0" sldId="270"/>
-            <ac:grpSpMk id="162" creationId="{741CA812-17D3-D6FC-51B2-908093B9C939}"/>
-          </ac:grpSpMkLst>
-        </pc:grpChg>
-        <pc:grpChg chg="add mod">
-          <ac:chgData name="Susana Vásquez" userId="dffc548e-2323-4ffc-a8aa-757e426c1faa" providerId="ADAL" clId="{CDF94FC1-676E-47EB-A349-9E3B1D8550EA}" dt="2024-11-30T08:39:06.488" v="1"/>
-          <ac:grpSpMkLst>
-            <pc:docMk/>
-            <pc:sldMk cId="0" sldId="270"/>
-            <ac:grpSpMk id="164" creationId="{DBEF0206-5C2A-6342-DDDA-6115FD9E83BE}"/>
-          </ac:grpSpMkLst>
-        </pc:grpChg>
-        <pc:grpChg chg="add mod">
-          <ac:chgData name="Susana Vásquez" userId="dffc548e-2323-4ffc-a8aa-757e426c1faa" providerId="ADAL" clId="{CDF94FC1-676E-47EB-A349-9E3B1D8550EA}" dt="2024-11-30T08:39:06.488" v="1"/>
-          <ac:grpSpMkLst>
-            <pc:docMk/>
-            <pc:sldMk cId="0" sldId="270"/>
-            <ac:grpSpMk id="166" creationId="{10194FC6-6D21-6F8D-5478-3FF74CCAB92D}"/>
-          </ac:grpSpMkLst>
-        </pc:grpChg>
-        <pc:grpChg chg="add mod">
-          <ac:chgData name="Susana Vásquez" userId="dffc548e-2323-4ffc-a8aa-757e426c1faa" providerId="ADAL" clId="{CDF94FC1-676E-47EB-A349-9E3B1D8550EA}" dt="2024-11-30T08:39:06.488" v="1"/>
-          <ac:grpSpMkLst>
-            <pc:docMk/>
-            <pc:sldMk cId="0" sldId="270"/>
-            <ac:grpSpMk id="168" creationId="{411B0F8B-927A-C3DB-06EB-123434831230}"/>
-          </ac:grpSpMkLst>
-        </pc:grpChg>
-        <pc:grpChg chg="add mod">
-          <ac:chgData name="Susana Vásquez" userId="dffc548e-2323-4ffc-a8aa-757e426c1faa" providerId="ADAL" clId="{CDF94FC1-676E-47EB-A349-9E3B1D8550EA}" dt="2024-11-30T08:39:06.488" v="1"/>
-          <ac:grpSpMkLst>
-            <pc:docMk/>
-            <pc:sldMk cId="0" sldId="270"/>
-            <ac:grpSpMk id="170" creationId="{E649DDA7-0EF6-D819-727B-E8D8221D6795}"/>
-          </ac:grpSpMkLst>
-        </pc:grpChg>
-        <pc:grpChg chg="mod">
-          <ac:chgData name="Susana Vásquez" userId="dffc548e-2323-4ffc-a8aa-757e426c1faa" providerId="ADAL" clId="{CDF94FC1-676E-47EB-A349-9E3B1D8550EA}" dt="2024-11-30T08:39:06.488" v="1"/>
-          <ac:grpSpMkLst>
-            <pc:docMk/>
-            <pc:sldMk cId="0" sldId="270"/>
-            <ac:grpSpMk id="171" creationId="{EC427154-D3C2-F632-6778-D5B481D9A18F}"/>
-          </ac:grpSpMkLst>
-        </pc:grpChg>
-        <pc:grpChg chg="add mod">
-          <ac:chgData name="Susana Vásquez" userId="dffc548e-2323-4ffc-a8aa-757e426c1faa" providerId="ADAL" clId="{CDF94FC1-676E-47EB-A349-9E3B1D8550EA}" dt="2024-11-30T08:39:06.488" v="1"/>
-          <ac:grpSpMkLst>
-            <pc:docMk/>
-            <pc:sldMk cId="0" sldId="270"/>
-            <ac:grpSpMk id="174" creationId="{23F86936-4368-D2D7-30AC-A19ACF2536E8}"/>
-          </ac:grpSpMkLst>
-        </pc:grpChg>
-        <pc:grpChg chg="mod">
-          <ac:chgData name="Susana Vásquez" userId="dffc548e-2323-4ffc-a8aa-757e426c1faa" providerId="ADAL" clId="{CDF94FC1-676E-47EB-A349-9E3B1D8550EA}" dt="2024-11-30T08:39:06.488" v="1"/>
-          <ac:grpSpMkLst>
-            <pc:docMk/>
-            <pc:sldMk cId="0" sldId="270"/>
-            <ac:grpSpMk id="175" creationId="{7E471FC0-DBC5-C205-4153-8D792AC1A5C3}"/>
-          </ac:grpSpMkLst>
-        </pc:grpChg>
-        <pc:grpChg chg="add mod">
-          <ac:chgData name="Susana Vásquez" userId="dffc548e-2323-4ffc-a8aa-757e426c1faa" providerId="ADAL" clId="{CDF94FC1-676E-47EB-A349-9E3B1D8550EA}" dt="2024-11-30T08:39:06.488" v="1"/>
-          <ac:grpSpMkLst>
-            <pc:docMk/>
-            <pc:sldMk cId="0" sldId="270"/>
-            <ac:grpSpMk id="179" creationId="{39563ACF-F410-E510-2B4A-CE745D8042AE}"/>
-          </ac:grpSpMkLst>
-        </pc:grpChg>
-        <pc:grpChg chg="add mod">
-          <ac:chgData name="Susana Vásquez" userId="dffc548e-2323-4ffc-a8aa-757e426c1faa" providerId="ADAL" clId="{CDF94FC1-676E-47EB-A349-9E3B1D8550EA}" dt="2024-11-30T08:39:06.488" v="1"/>
-          <ac:grpSpMkLst>
-            <pc:docMk/>
-            <pc:sldMk cId="0" sldId="270"/>
-            <ac:grpSpMk id="182" creationId="{A571F07B-1199-4558-D994-10CB01DCF50B}"/>
-          </ac:grpSpMkLst>
-        </pc:grpChg>
-        <pc:grpChg chg="mod">
-          <ac:chgData name="Susana Vásquez" userId="dffc548e-2323-4ffc-a8aa-757e426c1faa" providerId="ADAL" clId="{CDF94FC1-676E-47EB-A349-9E3B1D8550EA}" dt="2024-11-30T08:39:06.488" v="1"/>
-          <ac:grpSpMkLst>
-            <pc:docMk/>
-            <pc:sldMk cId="0" sldId="270"/>
-            <ac:grpSpMk id="183" creationId="{9638FFF3-9736-F84D-0BC8-6DD28C1D40B7}"/>
-          </ac:grpSpMkLst>
-        </pc:grpChg>
-        <pc:grpChg chg="add mod">
-          <ac:chgData name="Susana Vásquez" userId="dffc548e-2323-4ffc-a8aa-757e426c1faa" providerId="ADAL" clId="{CDF94FC1-676E-47EB-A349-9E3B1D8550EA}" dt="2024-11-30T08:39:06.488" v="1"/>
-          <ac:grpSpMkLst>
-            <pc:docMk/>
-            <pc:sldMk cId="0" sldId="270"/>
-            <ac:grpSpMk id="186" creationId="{E4601CE9-1F3C-8E3A-0426-29D6A7F601F8}"/>
-          </ac:grpSpMkLst>
-        </pc:grpChg>
-        <pc:grpChg chg="mod">
-          <ac:chgData name="Susana Vásquez" userId="dffc548e-2323-4ffc-a8aa-757e426c1faa" providerId="ADAL" clId="{CDF94FC1-676E-47EB-A349-9E3B1D8550EA}" dt="2024-11-30T08:39:06.488" v="1"/>
-          <ac:grpSpMkLst>
-            <pc:docMk/>
-            <pc:sldMk cId="0" sldId="270"/>
-            <ac:grpSpMk id="187" creationId="{73EACD9E-542E-C18E-69AD-D818EDE47813}"/>
-          </ac:grpSpMkLst>
-        </pc:grpChg>
-        <pc:grpChg chg="add mod">
-          <ac:chgData name="Susana Vásquez" userId="dffc548e-2323-4ffc-a8aa-757e426c1faa" providerId="ADAL" clId="{CDF94FC1-676E-47EB-A349-9E3B1D8550EA}" dt="2024-11-30T08:39:06.488" v="1"/>
-          <ac:grpSpMkLst>
-            <pc:docMk/>
-            <pc:sldMk cId="0" sldId="270"/>
-            <ac:grpSpMk id="203" creationId="{CF2018F7-E808-F495-D3AC-52B21389E862}"/>
-          </ac:grpSpMkLst>
-        </pc:grpChg>
       </pc:sldChg>
       <pc:sldChg chg="addSp delSp modSp add del mod">
         <pc:chgData name="Susana Vásquez" userId="dffc548e-2323-4ffc-a8aa-757e426c1faa" providerId="ADAL" clId="{CDF94FC1-676E-47EB-A349-9E3B1D8550EA}" dt="2024-11-30T08:40:54.657" v="19" actId="1076"/>
@@ -1170,22 +287,6 @@
           <pc:docMk/>
           <pc:sldMk cId="0" sldId="272"/>
         </pc:sldMkLst>
-        <pc:graphicFrameChg chg="add del modGraphic">
-          <ac:chgData name="Susana Vásquez" userId="dffc548e-2323-4ffc-a8aa-757e426c1faa" providerId="ADAL" clId="{CDF94FC1-676E-47EB-A349-9E3B1D8550EA}" dt="2024-11-30T08:40:48.259" v="15" actId="20577"/>
-          <ac:graphicFrameMkLst>
-            <pc:docMk/>
-            <pc:sldMk cId="0" sldId="272"/>
-            <ac:graphicFrameMk id="13" creationId="{00000000-0000-0000-0000-000000000000}"/>
-          </ac:graphicFrameMkLst>
-        </pc:graphicFrameChg>
-        <pc:picChg chg="add mod">
-          <ac:chgData name="Susana Vásquez" userId="dffc548e-2323-4ffc-a8aa-757e426c1faa" providerId="ADAL" clId="{CDF94FC1-676E-47EB-A349-9E3B1D8550EA}" dt="2024-11-30T08:40:54.657" v="19" actId="1076"/>
-          <ac:picMkLst>
-            <pc:docMk/>
-            <pc:sldMk cId="0" sldId="272"/>
-            <ac:picMk id="25" creationId="{9E6688C7-9987-54F9-C776-17C9F5769E57}"/>
-          </ac:picMkLst>
-        </pc:picChg>
       </pc:sldChg>
       <pc:sldChg chg="add del">
         <pc:chgData name="Susana Vásquez" userId="dffc548e-2323-4ffc-a8aa-757e426c1faa" providerId="ADAL" clId="{CDF94FC1-676E-47EB-A349-9E3B1D8550EA}" dt="2024-11-30T08:39:26.245" v="3"/>
@@ -1209,14 +310,6 @@
           <pc:docMk/>
           <pc:sldMk cId="0" sldId="257"/>
         </pc:sldMkLst>
-        <pc:spChg chg="mod">
-          <ac:chgData name="Susana Vásquez" userId="dffc548e-2323-4ffc-a8aa-757e426c1faa" providerId="ADAL" clId="{7CBEF9B2-E1BD-41D8-8236-32E23EE1C683}" dt="2025-01-14T07:42:22.270" v="2" actId="20577"/>
-          <ac:spMkLst>
-            <pc:docMk/>
-            <pc:sldMk cId="0" sldId="257"/>
-            <ac:spMk id="22" creationId="{00000000-0000-0000-0000-000000000000}"/>
-          </ac:spMkLst>
-        </pc:spChg>
       </pc:sldChg>
       <pc:sldChg chg="modSp mod">
         <pc:chgData name="Susana Vásquez" userId="dffc548e-2323-4ffc-a8aa-757e426c1faa" providerId="ADAL" clId="{7CBEF9B2-E1BD-41D8-8236-32E23EE1C683}" dt="2025-01-14T07:42:27.855" v="3" actId="14100"/>
@@ -1224,14 +317,6 @@
           <pc:docMk/>
           <pc:sldMk cId="0" sldId="258"/>
         </pc:sldMkLst>
-        <pc:spChg chg="mod">
-          <ac:chgData name="Susana Vásquez" userId="dffc548e-2323-4ffc-a8aa-757e426c1faa" providerId="ADAL" clId="{7CBEF9B2-E1BD-41D8-8236-32E23EE1C683}" dt="2025-01-14T07:42:27.855" v="3" actId="14100"/>
-          <ac:spMkLst>
-            <pc:docMk/>
-            <pc:sldMk cId="0" sldId="258"/>
-            <ac:spMk id="41" creationId="{00000000-0000-0000-0000-000000000000}"/>
-          </ac:spMkLst>
-        </pc:spChg>
       </pc:sldChg>
       <pc:sldChg chg="modSp mod">
         <pc:chgData name="Susana Vásquez" userId="dffc548e-2323-4ffc-a8aa-757e426c1faa" providerId="ADAL" clId="{7CBEF9B2-E1BD-41D8-8236-32E23EE1C683}" dt="2025-01-14T07:43:50.695" v="23" actId="20577"/>
@@ -1239,30 +324,6 @@
           <pc:docMk/>
           <pc:sldMk cId="0" sldId="260"/>
         </pc:sldMkLst>
-        <pc:spChg chg="mod">
-          <ac:chgData name="Susana Vásquez" userId="dffc548e-2323-4ffc-a8aa-757e426c1faa" providerId="ADAL" clId="{7CBEF9B2-E1BD-41D8-8236-32E23EE1C683}" dt="2025-01-14T07:42:51.643" v="7" actId="14100"/>
-          <ac:spMkLst>
-            <pc:docMk/>
-            <pc:sldMk cId="0" sldId="260"/>
-            <ac:spMk id="15" creationId="{00000000-0000-0000-0000-000000000000}"/>
-          </ac:spMkLst>
-        </pc:spChg>
-        <pc:spChg chg="mod">
-          <ac:chgData name="Susana Vásquez" userId="dffc548e-2323-4ffc-a8aa-757e426c1faa" providerId="ADAL" clId="{7CBEF9B2-E1BD-41D8-8236-32E23EE1C683}" dt="2025-01-14T07:43:41.566" v="19" actId="20577"/>
-          <ac:spMkLst>
-            <pc:docMk/>
-            <pc:sldMk cId="0" sldId="260"/>
-            <ac:spMk id="20" creationId="{00000000-0000-0000-0000-000000000000}"/>
-          </ac:spMkLst>
-        </pc:spChg>
-        <pc:spChg chg="mod">
-          <ac:chgData name="Susana Vásquez" userId="dffc548e-2323-4ffc-a8aa-757e426c1faa" providerId="ADAL" clId="{7CBEF9B2-E1BD-41D8-8236-32E23EE1C683}" dt="2025-01-14T07:43:50.695" v="23" actId="20577"/>
-          <ac:spMkLst>
-            <pc:docMk/>
-            <pc:sldMk cId="0" sldId="260"/>
-            <ac:spMk id="22" creationId="{00000000-0000-0000-0000-000000000000}"/>
-          </ac:spMkLst>
-        </pc:spChg>
       </pc:sldChg>
       <pc:sldChg chg="addSp delSp modSp mod">
         <pc:chgData name="Susana Vásquez" userId="dffc548e-2323-4ffc-a8aa-757e426c1faa" providerId="ADAL" clId="{7CBEF9B2-E1BD-41D8-8236-32E23EE1C683}" dt="2025-01-14T07:43:06.163" v="10" actId="14100"/>
@@ -1270,22 +331,6 @@
           <pc:docMk/>
           <pc:sldMk cId="0" sldId="261"/>
         </pc:sldMkLst>
-        <pc:spChg chg="del">
-          <ac:chgData name="Susana Vásquez" userId="dffc548e-2323-4ffc-a8aa-757e426c1faa" providerId="ADAL" clId="{7CBEF9B2-E1BD-41D8-8236-32E23EE1C683}" dt="2025-01-14T07:43:02.039" v="8" actId="478"/>
-          <ac:spMkLst>
-            <pc:docMk/>
-            <pc:sldMk cId="0" sldId="261"/>
-            <ac:spMk id="18" creationId="{00000000-0000-0000-0000-000000000000}"/>
-          </ac:spMkLst>
-        </pc:spChg>
-        <pc:spChg chg="add mod">
-          <ac:chgData name="Susana Vásquez" userId="dffc548e-2323-4ffc-a8aa-757e426c1faa" providerId="ADAL" clId="{7CBEF9B2-E1BD-41D8-8236-32E23EE1C683}" dt="2025-01-14T07:43:06.163" v="10" actId="14100"/>
-          <ac:spMkLst>
-            <pc:docMk/>
-            <pc:sldMk cId="0" sldId="261"/>
-            <ac:spMk id="20" creationId="{28F4C5C1-F687-9163-0881-C9502D449098}"/>
-          </ac:spMkLst>
-        </pc:spChg>
       </pc:sldChg>
       <pc:sldChg chg="addSp delSp modSp mod">
         <pc:chgData name="Susana Vásquez" userId="dffc548e-2323-4ffc-a8aa-757e426c1faa" providerId="ADAL" clId="{7CBEF9B2-E1BD-41D8-8236-32E23EE1C683}" dt="2025-01-14T07:43:12.990" v="12"/>
@@ -1293,22 +338,6 @@
           <pc:docMk/>
           <pc:sldMk cId="0" sldId="262"/>
         </pc:sldMkLst>
-        <pc:spChg chg="del">
-          <ac:chgData name="Susana Vásquez" userId="dffc548e-2323-4ffc-a8aa-757e426c1faa" providerId="ADAL" clId="{7CBEF9B2-E1BD-41D8-8236-32E23EE1C683}" dt="2025-01-14T07:43:12.646" v="11" actId="478"/>
-          <ac:spMkLst>
-            <pc:docMk/>
-            <pc:sldMk cId="0" sldId="262"/>
-            <ac:spMk id="39" creationId="{00000000-0000-0000-0000-000000000000}"/>
-          </ac:spMkLst>
-        </pc:spChg>
-        <pc:spChg chg="add mod">
-          <ac:chgData name="Susana Vásquez" userId="dffc548e-2323-4ffc-a8aa-757e426c1faa" providerId="ADAL" clId="{7CBEF9B2-E1BD-41D8-8236-32E23EE1C683}" dt="2025-01-14T07:43:12.990" v="12"/>
-          <ac:spMkLst>
-            <pc:docMk/>
-            <pc:sldMk cId="0" sldId="262"/>
-            <ac:spMk id="40" creationId="{4AC9A6D3-C6B7-E94C-D2BF-E26EBF9CFBC8}"/>
-          </ac:spMkLst>
-        </pc:spChg>
       </pc:sldChg>
       <pc:sldChg chg="addSp delSp modSp mod">
         <pc:chgData name="Susana Vásquez" userId="dffc548e-2323-4ffc-a8aa-757e426c1faa" providerId="ADAL" clId="{7CBEF9B2-E1BD-41D8-8236-32E23EE1C683}" dt="2025-01-14T07:44:13.193" v="31" actId="20577"/>
@@ -1316,30 +345,6 @@
           <pc:docMk/>
           <pc:sldMk cId="0" sldId="263"/>
         </pc:sldMkLst>
-        <pc:spChg chg="mod">
-          <ac:chgData name="Susana Vásquez" userId="dffc548e-2323-4ffc-a8aa-757e426c1faa" providerId="ADAL" clId="{7CBEF9B2-E1BD-41D8-8236-32E23EE1C683}" dt="2025-01-14T07:44:13.193" v="31" actId="20577"/>
-          <ac:spMkLst>
-            <pc:docMk/>
-            <pc:sldMk cId="0" sldId="263"/>
-            <ac:spMk id="17" creationId="{00000000-0000-0000-0000-000000000000}"/>
-          </ac:spMkLst>
-        </pc:spChg>
-        <pc:spChg chg="del">
-          <ac:chgData name="Susana Vásquez" userId="dffc548e-2323-4ffc-a8aa-757e426c1faa" providerId="ADAL" clId="{7CBEF9B2-E1BD-41D8-8236-32E23EE1C683}" dt="2025-01-14T07:43:28.590" v="15" actId="478"/>
-          <ac:spMkLst>
-            <pc:docMk/>
-            <pc:sldMk cId="0" sldId="263"/>
-            <ac:spMk id="22" creationId="{00000000-0000-0000-0000-000000000000}"/>
-          </ac:spMkLst>
-        </pc:spChg>
-        <pc:spChg chg="add mod">
-          <ac:chgData name="Susana Vásquez" userId="dffc548e-2323-4ffc-a8aa-757e426c1faa" providerId="ADAL" clId="{7CBEF9B2-E1BD-41D8-8236-32E23EE1C683}" dt="2025-01-14T07:43:28.903" v="16"/>
-          <ac:spMkLst>
-            <pc:docMk/>
-            <pc:sldMk cId="0" sldId="263"/>
-            <ac:spMk id="31" creationId="{7CC184E1-CC1F-04D2-35E5-CAD51C5F55FE}"/>
-          </ac:spMkLst>
-        </pc:spChg>
       </pc:sldChg>
       <pc:sldChg chg="addSp delSp modSp mod">
         <pc:chgData name="Susana Vásquez" userId="dffc548e-2323-4ffc-a8aa-757e426c1faa" providerId="ADAL" clId="{7CBEF9B2-E1BD-41D8-8236-32E23EE1C683}" dt="2025-01-14T07:43:18.610" v="14"/>
@@ -1347,22 +352,6 @@
           <pc:docMk/>
           <pc:sldMk cId="0" sldId="264"/>
         </pc:sldMkLst>
-        <pc:spChg chg="del">
-          <ac:chgData name="Susana Vásquez" userId="dffc548e-2323-4ffc-a8aa-757e426c1faa" providerId="ADAL" clId="{7CBEF9B2-E1BD-41D8-8236-32E23EE1C683}" dt="2025-01-14T07:43:18.350" v="13" actId="478"/>
-          <ac:spMkLst>
-            <pc:docMk/>
-            <pc:sldMk cId="0" sldId="264"/>
-            <ac:spMk id="20" creationId="{00000000-0000-0000-0000-000000000000}"/>
-          </ac:spMkLst>
-        </pc:spChg>
-        <pc:spChg chg="add mod">
-          <ac:chgData name="Susana Vásquez" userId="dffc548e-2323-4ffc-a8aa-757e426c1faa" providerId="ADAL" clId="{7CBEF9B2-E1BD-41D8-8236-32E23EE1C683}" dt="2025-01-14T07:43:18.610" v="14"/>
-          <ac:spMkLst>
-            <pc:docMk/>
-            <pc:sldMk cId="0" sldId="264"/>
-            <ac:spMk id="22" creationId="{65EF58BA-0EAF-626D-A39D-E2320A9E6CE4}"/>
-          </ac:spMkLst>
-        </pc:spChg>
       </pc:sldChg>
       <pc:sldChg chg="modSp mod">
         <pc:chgData name="Susana Vásquez" userId="dffc548e-2323-4ffc-a8aa-757e426c1faa" providerId="ADAL" clId="{7CBEF9B2-E1BD-41D8-8236-32E23EE1C683}" dt="2025-01-14T07:44:30.954" v="32" actId="20577"/>
@@ -1370,14 +359,6 @@
           <pc:docMk/>
           <pc:sldMk cId="0" sldId="266"/>
         </pc:sldMkLst>
-        <pc:spChg chg="mod">
-          <ac:chgData name="Susana Vásquez" userId="dffc548e-2323-4ffc-a8aa-757e426c1faa" providerId="ADAL" clId="{7CBEF9B2-E1BD-41D8-8236-32E23EE1C683}" dt="2025-01-14T07:44:30.954" v="32" actId="20577"/>
-          <ac:spMkLst>
-            <pc:docMk/>
-            <pc:sldMk cId="0" sldId="266"/>
-            <ac:spMk id="16" creationId="{00000000-0000-0000-0000-000000000000}"/>
-          </ac:spMkLst>
-        </pc:spChg>
       </pc:sldChg>
       <pc:sldChg chg="modSp mod">
         <pc:chgData name="Susana Vásquez" userId="dffc548e-2323-4ffc-a8aa-757e426c1faa" providerId="ADAL" clId="{7CBEF9B2-E1BD-41D8-8236-32E23EE1C683}" dt="2025-01-14T07:45:52.188" v="43" actId="14734"/>
@@ -1385,14 +366,6 @@
           <pc:docMk/>
           <pc:sldMk cId="0" sldId="268"/>
         </pc:sldMkLst>
-        <pc:graphicFrameChg chg="modGraphic">
-          <ac:chgData name="Susana Vásquez" userId="dffc548e-2323-4ffc-a8aa-757e426c1faa" providerId="ADAL" clId="{7CBEF9B2-E1BD-41D8-8236-32E23EE1C683}" dt="2025-01-14T07:45:52.188" v="43" actId="14734"/>
-          <ac:graphicFrameMkLst>
-            <pc:docMk/>
-            <pc:sldMk cId="0" sldId="268"/>
-            <ac:graphicFrameMk id="14" creationId="{00000000-0000-0000-0000-000000000000}"/>
-          </ac:graphicFrameMkLst>
-        </pc:graphicFrameChg>
       </pc:sldChg>
       <pc:sldChg chg="modSp mod">
         <pc:chgData name="Susana Vásquez" userId="dffc548e-2323-4ffc-a8aa-757e426c1faa" providerId="ADAL" clId="{7CBEF9B2-E1BD-41D8-8236-32E23EE1C683}" dt="2025-01-14T07:46:02.619" v="46" actId="14734"/>
@@ -1400,14 +373,6 @@
           <pc:docMk/>
           <pc:sldMk cId="0" sldId="269"/>
         </pc:sldMkLst>
-        <pc:graphicFrameChg chg="modGraphic">
-          <ac:chgData name="Susana Vásquez" userId="dffc548e-2323-4ffc-a8aa-757e426c1faa" providerId="ADAL" clId="{7CBEF9B2-E1BD-41D8-8236-32E23EE1C683}" dt="2025-01-14T07:46:02.619" v="46" actId="14734"/>
-          <ac:graphicFrameMkLst>
-            <pc:docMk/>
-            <pc:sldMk cId="0" sldId="269"/>
-            <ac:graphicFrameMk id="9" creationId="{00000000-0000-0000-0000-000000000000}"/>
-          </ac:graphicFrameMkLst>
-        </pc:graphicFrameChg>
       </pc:sldChg>
       <pc:sldChg chg="modSp mod">
         <pc:chgData name="Susana Vásquez" userId="dffc548e-2323-4ffc-a8aa-757e426c1faa" providerId="ADAL" clId="{7CBEF9B2-E1BD-41D8-8236-32E23EE1C683}" dt="2025-01-14T07:45:40.427" v="40" actId="1076"/>
@@ -1415,46 +380,6 @@
           <pc:docMk/>
           <pc:sldMk cId="0" sldId="270"/>
         </pc:sldMkLst>
-        <pc:spChg chg="mod">
-          <ac:chgData name="Susana Vásquez" userId="dffc548e-2323-4ffc-a8aa-757e426c1faa" providerId="ADAL" clId="{7CBEF9B2-E1BD-41D8-8236-32E23EE1C683}" dt="2025-01-14T07:45:01.159" v="34" actId="14100"/>
-          <ac:spMkLst>
-            <pc:docMk/>
-            <pc:sldMk cId="0" sldId="270"/>
-            <ac:spMk id="138" creationId="{AE7A2E66-8575-4B39-70E9-D14246EF71AB}"/>
-          </ac:spMkLst>
-        </pc:spChg>
-        <pc:spChg chg="mod">
-          <ac:chgData name="Susana Vásquez" userId="dffc548e-2323-4ffc-a8aa-757e426c1faa" providerId="ADAL" clId="{7CBEF9B2-E1BD-41D8-8236-32E23EE1C683}" dt="2025-01-14T07:45:15.047" v="37" actId="14100"/>
-          <ac:spMkLst>
-            <pc:docMk/>
-            <pc:sldMk cId="0" sldId="270"/>
-            <ac:spMk id="172" creationId="{902B908A-755C-A89D-FD49-020B9C63977B}"/>
-          </ac:spMkLst>
-        </pc:spChg>
-        <pc:spChg chg="mod">
-          <ac:chgData name="Susana Vásquez" userId="dffc548e-2323-4ffc-a8aa-757e426c1faa" providerId="ADAL" clId="{7CBEF9B2-E1BD-41D8-8236-32E23EE1C683}" dt="2025-01-14T07:45:05.993" v="35" actId="14100"/>
-          <ac:spMkLst>
-            <pc:docMk/>
-            <pc:sldMk cId="0" sldId="270"/>
-            <ac:spMk id="176" creationId="{9DF556C8-DF1F-C604-DB74-364B201560D6}"/>
-          </ac:spMkLst>
-        </pc:spChg>
-        <pc:spChg chg="mod">
-          <ac:chgData name="Susana Vásquez" userId="dffc548e-2323-4ffc-a8aa-757e426c1faa" providerId="ADAL" clId="{7CBEF9B2-E1BD-41D8-8236-32E23EE1C683}" dt="2025-01-14T07:45:28.336" v="39" actId="14100"/>
-          <ac:spMkLst>
-            <pc:docMk/>
-            <pc:sldMk cId="0" sldId="270"/>
-            <ac:spMk id="188" creationId="{A20555BB-EC3A-68C3-5F6C-2EA01EAB9F6E}"/>
-          </ac:spMkLst>
-        </pc:spChg>
-        <pc:spChg chg="mod">
-          <ac:chgData name="Susana Vásquez" userId="dffc548e-2323-4ffc-a8aa-757e426c1faa" providerId="ADAL" clId="{7CBEF9B2-E1BD-41D8-8236-32E23EE1C683}" dt="2025-01-14T07:45:40.427" v="40" actId="1076"/>
-          <ac:spMkLst>
-            <pc:docMk/>
-            <pc:sldMk cId="0" sldId="270"/>
-            <ac:spMk id="199" creationId="{4501F22C-3BD4-3A12-03BA-5E7ADC10E1A9}"/>
-          </ac:spMkLst>
-        </pc:spChg>
       </pc:sldChg>
       <pc:sldChg chg="modSp mod">
         <pc:chgData name="Susana Vásquez" userId="dffc548e-2323-4ffc-a8aa-757e426c1faa" providerId="ADAL" clId="{7CBEF9B2-E1BD-41D8-8236-32E23EE1C683}" dt="2025-01-14T07:46:12.305" v="48" actId="14734"/>
@@ -1462,14 +387,6 @@
           <pc:docMk/>
           <pc:sldMk cId="0" sldId="272"/>
         </pc:sldMkLst>
-        <pc:graphicFrameChg chg="modGraphic">
-          <ac:chgData name="Susana Vásquez" userId="dffc548e-2323-4ffc-a8aa-757e426c1faa" providerId="ADAL" clId="{7CBEF9B2-E1BD-41D8-8236-32E23EE1C683}" dt="2025-01-14T07:46:12.305" v="48" actId="14734"/>
-          <ac:graphicFrameMkLst>
-            <pc:docMk/>
-            <pc:sldMk cId="0" sldId="272"/>
-            <ac:graphicFrameMk id="13" creationId="{00000000-0000-0000-0000-000000000000}"/>
-          </ac:graphicFrameMkLst>
-        </pc:graphicFrameChg>
       </pc:sldChg>
       <pc:sldChg chg="modSp mod">
         <pc:chgData name="Susana Vásquez" userId="dffc548e-2323-4ffc-a8aa-757e426c1faa" providerId="ADAL" clId="{7CBEF9B2-E1BD-41D8-8236-32E23EE1C683}" dt="2025-01-14T07:46:22.289" v="51" actId="14734"/>
@@ -1477,14 +394,6 @@
           <pc:docMk/>
           <pc:sldMk cId="0" sldId="273"/>
         </pc:sldMkLst>
-        <pc:graphicFrameChg chg="modGraphic">
-          <ac:chgData name="Susana Vásquez" userId="dffc548e-2323-4ffc-a8aa-757e426c1faa" providerId="ADAL" clId="{7CBEF9B2-E1BD-41D8-8236-32E23EE1C683}" dt="2025-01-14T07:46:22.289" v="51" actId="14734"/>
-          <ac:graphicFrameMkLst>
-            <pc:docMk/>
-            <pc:sldMk cId="0" sldId="273"/>
-            <ac:graphicFrameMk id="13" creationId="{00000000-0000-0000-0000-000000000000}"/>
-          </ac:graphicFrameMkLst>
-        </pc:graphicFrameChg>
       </pc:sldChg>
     </pc:docChg>
   </pc:docChgLst>
@@ -1671,7 +580,7 @@
             <a:fld id="{1D8BD707-D9CF-40AE-B4C6-C98DA3205C09}" type="datetimeFigureOut">
               <a:rPr lang="en-US" smtClean="0"/>
               <a:pPr/>
-              <a:t>1/14/2025</a:t>
+              <a:t>10/16/2025</a:t>
             </a:fld>
             <a:endParaRPr lang="en-US"/>
           </a:p>
@@ -1836,7 +745,7 @@
             <a:fld id="{1D8BD707-D9CF-40AE-B4C6-C98DA3205C09}" type="datetimeFigureOut">
               <a:rPr lang="en-US" smtClean="0"/>
               <a:pPr/>
-              <a:t>1/14/2025</a:t>
+              <a:t>10/16/2025</a:t>
             </a:fld>
             <a:endParaRPr lang="en-US"/>
           </a:p>
@@ -2011,7 +920,7 @@
             <a:fld id="{1D8BD707-D9CF-40AE-B4C6-C98DA3205C09}" type="datetimeFigureOut">
               <a:rPr lang="en-US" smtClean="0"/>
               <a:pPr/>
-              <a:t>1/14/2025</a:t>
+              <a:t>10/16/2025</a:t>
             </a:fld>
             <a:endParaRPr lang="en-US"/>
           </a:p>
@@ -2176,7 +1085,7 @@
             <a:fld id="{1D8BD707-D9CF-40AE-B4C6-C98DA3205C09}" type="datetimeFigureOut">
               <a:rPr lang="en-US" smtClean="0"/>
               <a:pPr/>
-              <a:t>1/14/2025</a:t>
+              <a:t>10/16/2025</a:t>
             </a:fld>
             <a:endParaRPr lang="en-US"/>
           </a:p>
@@ -2418,7 +1327,7 @@
             <a:fld id="{1D8BD707-D9CF-40AE-B4C6-C98DA3205C09}" type="datetimeFigureOut">
               <a:rPr lang="en-US" smtClean="0"/>
               <a:pPr/>
-              <a:t>1/14/2025</a:t>
+              <a:t>10/16/2025</a:t>
             </a:fld>
             <a:endParaRPr lang="en-US"/>
           </a:p>
@@ -2700,7 +1609,7 @@
             <a:fld id="{1D8BD707-D9CF-40AE-B4C6-C98DA3205C09}" type="datetimeFigureOut">
               <a:rPr lang="en-US" smtClean="0"/>
               <a:pPr/>
-              <a:t>1/14/2025</a:t>
+              <a:t>10/16/2025</a:t>
             </a:fld>
             <a:endParaRPr lang="en-US"/>
           </a:p>
@@ -3116,7 +2025,7 @@
             <a:fld id="{1D8BD707-D9CF-40AE-B4C6-C98DA3205C09}" type="datetimeFigureOut">
               <a:rPr lang="en-US" smtClean="0"/>
               <a:pPr/>
-              <a:t>1/14/2025</a:t>
+              <a:t>10/16/2025</a:t>
             </a:fld>
             <a:endParaRPr lang="en-US"/>
           </a:p>
@@ -3230,7 +2139,7 @@
             <a:fld id="{1D8BD707-D9CF-40AE-B4C6-C98DA3205C09}" type="datetimeFigureOut">
               <a:rPr lang="en-US" smtClean="0"/>
               <a:pPr/>
-              <a:t>1/14/2025</a:t>
+              <a:t>10/16/2025</a:t>
             </a:fld>
             <a:endParaRPr lang="en-US"/>
           </a:p>
@@ -3322,7 +2231,7 @@
             <a:fld id="{1D8BD707-D9CF-40AE-B4C6-C98DA3205C09}" type="datetimeFigureOut">
               <a:rPr lang="en-US" smtClean="0"/>
               <a:pPr/>
-              <a:t>1/14/2025</a:t>
+              <a:t>10/16/2025</a:t>
             </a:fld>
             <a:endParaRPr lang="en-US"/>
           </a:p>
@@ -3594,7 +2503,7 @@
             <a:fld id="{1D8BD707-D9CF-40AE-B4C6-C98DA3205C09}" type="datetimeFigureOut">
               <a:rPr lang="en-US" smtClean="0"/>
               <a:pPr/>
-              <a:t>1/14/2025</a:t>
+              <a:t>10/16/2025</a:t>
             </a:fld>
             <a:endParaRPr lang="en-US"/>
           </a:p>
@@ -3843,7 +2752,7 @@
             <a:fld id="{1D8BD707-D9CF-40AE-B4C6-C98DA3205C09}" type="datetimeFigureOut">
               <a:rPr lang="en-US" smtClean="0"/>
               <a:pPr/>
-              <a:t>1/14/2025</a:t>
+              <a:t>10/16/2025</a:t>
             </a:fld>
             <a:endParaRPr lang="en-US"/>
           </a:p>
@@ -4051,7 +2960,7 @@
             <a:fld id="{1D8BD707-D9CF-40AE-B4C6-C98DA3205C09}" type="datetimeFigureOut">
               <a:rPr lang="en-US" smtClean="0"/>
               <a:pPr/>
-              <a:t>1/14/2025</a:t>
+              <a:t>10/16/2025</a:t>
             </a:fld>
             <a:endParaRPr lang="en-US"/>
           </a:p>
@@ -5043,6 +3952,52 @@
           </a:p>
         </p:txBody>
       </p:sp>
+      <p:pic>
+        <p:nvPicPr>
+          <p:cNvPr id="12" name="Picture 11" descr="A grey square with white text&#10;&#10;AI-generated content may be incorrect.">
+            <a:extLst>
+              <a:ext uri="{FF2B5EF4-FFF2-40B4-BE49-F238E27FC236}">
+                <a16:creationId xmlns:a16="http://schemas.microsoft.com/office/drawing/2014/main" id="{2ADF4236-C311-988C-1EAF-F33444BF8989}"/>
+              </a:ext>
+            </a:extLst>
+          </p:cNvPr>
+          <p:cNvPicPr>
+            <a:picLocks noChangeAspect="1"/>
+          </p:cNvPicPr>
+          <p:nvPr/>
+        </p:nvPicPr>
+        <p:blipFill rotWithShape="1">
+          <a:blip r:embed="rId9">
+            <a:extLst>
+              <a:ext uri="{28A0092B-C50C-407E-A947-70E740481C1C}">
+                <a14:useLocalDpi xmlns:a14="http://schemas.microsoft.com/office/drawing/2010/main" val="0"/>
+              </a:ext>
+            </a:extLst>
+          </a:blip>
+          <a:srcRect r="18171" b="16231"/>
+          <a:stretch>
+            <a:fillRect/>
+          </a:stretch>
+        </p:blipFill>
+        <p:spPr bwMode="auto">
+          <a:xfrm>
+            <a:off x="894229" y="9356962"/>
+            <a:ext cx="2092960" cy="556895"/>
+          </a:xfrm>
+          <a:prstGeom prst="rect">
+            <a:avLst/>
+          </a:prstGeom>
+          <a:noFill/>
+          <a:ln>
+            <a:noFill/>
+          </a:ln>
+          <a:extLst>
+            <a:ext uri="{53640926-AAD7-44D8-BBD7-CCE9431645EC}">
+              <a14:shadowObscured xmlns:a14="http://schemas.microsoft.com/office/drawing/2010/main"/>
+            </a:ext>
+          </a:extLst>
+        </p:spPr>
+      </p:pic>
     </p:spTree>
   </p:cSld>
   <p:clrMapOvr>
